--- a/PROJET/Presentation_Volarus_Condensee_v3.pptx
+++ b/PROJET/Presentation_Volarus_Condensee_v3.pptx
@@ -129,6 +129,73 @@
 </p:presentation>
 </file>
 
+<file path=ppt/revisionInfo.xml><?xml version="1.0" encoding="utf-8"?>
+<p1510:revInfo xmlns:a="http://schemas.openxmlformats.org/drawingml/2006/main" xmlns:r="http://schemas.openxmlformats.org/officeDocument/2006/relationships" xmlns:p1510="http://schemas.microsoft.com/office/powerpoint/2015/10/main">
+  <p1510:revLst>
+    <p1510:client id="{B0E2BBC6-32AC-4129-AF59-927F125864FC}" v="1" dt="2026-10-07T20:36:30.432"/>
+  </p1510:revLst>
+</p1510:revInfo>
+</file>
+
+<file path=ppt/changesInfos/changesInfo1.xml><?xml version="1.0" encoding="utf-8"?>
+<pc:chgInfo xmlns:a="http://schemas.openxmlformats.org/drawingml/2006/main" xmlns:r="http://schemas.openxmlformats.org/officeDocument/2006/relationships" xmlns:ac="http://schemas.microsoft.com/office/drawing/2013/main/command" xmlns:pc="http://schemas.microsoft.com/office/powerpoint/2013/main/command">
+  <pc:docChgLst>
+    <pc:chgData name="alex seguin" userId="c47c39593cf1707d" providerId="LiveId" clId="{56C82717-B78C-4079-A034-267DC212A18F}"/>
+    <pc:docChg chg="modSld sldOrd">
+      <pc:chgData name="alex seguin" userId="c47c39593cf1707d" providerId="LiveId" clId="{56C82717-B78C-4079-A034-267DC212A18F}" dt="2026-10-07T20:36:30.431" v="54"/>
+      <pc:docMkLst>
+        <pc:docMk/>
+      </pc:docMkLst>
+      <pc:sldChg chg="ord">
+        <pc:chgData name="alex seguin" userId="c47c39593cf1707d" providerId="LiveId" clId="{56C82717-B78C-4079-A034-267DC212A18F}" dt="2026-10-06T13:09:06.665" v="1"/>
+        <pc:sldMkLst>
+          <pc:docMk/>
+          <pc:sldMk cId="0" sldId="259"/>
+        </pc:sldMkLst>
+      </pc:sldChg>
+      <pc:sldChg chg="modSp mod">
+        <pc:chgData name="alex seguin" userId="c47c39593cf1707d" providerId="LiveId" clId="{56C82717-B78C-4079-A034-267DC212A18F}" dt="2026-10-07T20:34:40.983" v="41" actId="20577"/>
+        <pc:sldMkLst>
+          <pc:docMk/>
+          <pc:sldMk cId="0" sldId="261"/>
+        </pc:sldMkLst>
+        <pc:spChg chg="mod">
+          <ac:chgData name="alex seguin" userId="c47c39593cf1707d" providerId="LiveId" clId="{56C82717-B78C-4079-A034-267DC212A18F}" dt="2026-10-07T20:34:00.023" v="10" actId="20577"/>
+          <ac:spMkLst>
+            <pc:docMk/>
+            <pc:sldMk cId="0" sldId="261"/>
+            <ac:spMk id="5" creationId="{00000000-0000-0000-0000-000000000000}"/>
+          </ac:spMkLst>
+        </pc:spChg>
+        <pc:spChg chg="mod">
+          <ac:chgData name="alex seguin" userId="c47c39593cf1707d" providerId="LiveId" clId="{56C82717-B78C-4079-A034-267DC212A18F}" dt="2026-10-07T20:34:40.983" v="41" actId="20577"/>
+          <ac:spMkLst>
+            <pc:docMk/>
+            <pc:sldMk cId="0" sldId="261"/>
+            <ac:spMk id="11" creationId="{00000000-0000-0000-0000-000000000000}"/>
+          </ac:spMkLst>
+        </pc:spChg>
+      </pc:sldChg>
+      <pc:sldChg chg="modSp mod">
+        <pc:chgData name="alex seguin" userId="c47c39593cf1707d" providerId="LiveId" clId="{56C82717-B78C-4079-A034-267DC212A18F}" dt="2026-10-07T20:36:30.431" v="54"/>
+        <pc:sldMkLst>
+          <pc:docMk/>
+          <pc:sldMk cId="0" sldId="262"/>
+        </pc:sldMkLst>
+        <pc:spChg chg="mod">
+          <ac:chgData name="alex seguin" userId="c47c39593cf1707d" providerId="LiveId" clId="{56C82717-B78C-4079-A034-267DC212A18F}" dt="2026-10-07T20:36:30.431" v="54"/>
+          <ac:spMkLst>
+            <pc:docMk/>
+            <pc:sldMk cId="0" sldId="262"/>
+            <ac:spMk id="11" creationId="{00000000-0000-0000-0000-000000000000}"/>
+          </ac:spMkLst>
+        </pc:spChg>
+      </pc:sldChg>
+    </pc:docChg>
+  </pc:docChgLst>
+</pc:chgInfo>
+</file>
+
 <file path=ppt/slideLayouts/slideLayout1.xml><?xml version="1.0" encoding="utf-8"?>
 <p:sldLayout xmlns:a="http://schemas.openxmlformats.org/drawingml/2006/main" xmlns:r="http://schemas.openxmlformats.org/officeDocument/2006/relationships" xmlns:p="http://schemas.openxmlformats.org/presentationml/2006/main" type="title" preserve="1">
   <p:cSld name="Title Slide">
@@ -308,7 +375,7 @@
           <a:p>
             <a:fld id="{5BCAD085-E8A6-8845-BD4E-CB4CCA059FC4}" type="datetimeFigureOut">
               <a:rPr lang="en-US" smtClean="0"/>
-              <a:t>10/2/2026</a:t>
+              <a:t>10/7/2026</a:t>
             </a:fld>
             <a:endParaRPr lang="en-US"/>
           </a:p>
@@ -476,7 +543,7 @@
           <a:p>
             <a:fld id="{5BCAD085-E8A6-8845-BD4E-CB4CCA059FC4}" type="datetimeFigureOut">
               <a:rPr lang="en-US" smtClean="0"/>
-              <a:t>10/2/2026</a:t>
+              <a:t>10/7/2026</a:t>
             </a:fld>
             <a:endParaRPr lang="en-US"/>
           </a:p>
@@ -654,7 +721,7 @@
           <a:p>
             <a:fld id="{5BCAD085-E8A6-8845-BD4E-CB4CCA059FC4}" type="datetimeFigureOut">
               <a:rPr lang="en-US" smtClean="0"/>
-              <a:t>10/2/2026</a:t>
+              <a:t>10/7/2026</a:t>
             </a:fld>
             <a:endParaRPr lang="en-US"/>
           </a:p>
@@ -822,7 +889,7 @@
           <a:p>
             <a:fld id="{5BCAD085-E8A6-8845-BD4E-CB4CCA059FC4}" type="datetimeFigureOut">
               <a:rPr lang="en-US" smtClean="0"/>
-              <a:t>10/2/2026</a:t>
+              <a:t>10/7/2026</a:t>
             </a:fld>
             <a:endParaRPr lang="en-US"/>
           </a:p>
@@ -1067,7 +1134,7 @@
           <a:p>
             <a:fld id="{5BCAD085-E8A6-8845-BD4E-CB4CCA059FC4}" type="datetimeFigureOut">
               <a:rPr lang="en-US" smtClean="0"/>
-              <a:t>10/2/2026</a:t>
+              <a:t>10/7/2026</a:t>
             </a:fld>
             <a:endParaRPr lang="en-US"/>
           </a:p>
@@ -1352,7 +1419,7 @@
           <a:p>
             <a:fld id="{5BCAD085-E8A6-8845-BD4E-CB4CCA059FC4}" type="datetimeFigureOut">
               <a:rPr lang="en-US" smtClean="0"/>
-              <a:t>10/2/2026</a:t>
+              <a:t>10/7/2026</a:t>
             </a:fld>
             <a:endParaRPr lang="en-US"/>
           </a:p>
@@ -1771,7 +1838,7 @@
           <a:p>
             <a:fld id="{5BCAD085-E8A6-8845-BD4E-CB4CCA059FC4}" type="datetimeFigureOut">
               <a:rPr lang="en-US" smtClean="0"/>
-              <a:t>10/2/2026</a:t>
+              <a:t>10/7/2026</a:t>
             </a:fld>
             <a:endParaRPr lang="en-US"/>
           </a:p>
@@ -1888,7 +1955,7 @@
           <a:p>
             <a:fld id="{5BCAD085-E8A6-8845-BD4E-CB4CCA059FC4}" type="datetimeFigureOut">
               <a:rPr lang="en-US" smtClean="0"/>
-              <a:t>10/2/2026</a:t>
+              <a:t>10/7/2026</a:t>
             </a:fld>
             <a:endParaRPr lang="en-US"/>
           </a:p>
@@ -1983,7 +2050,7 @@
           <a:p>
             <a:fld id="{5BCAD085-E8A6-8845-BD4E-CB4CCA059FC4}" type="datetimeFigureOut">
               <a:rPr lang="en-US" smtClean="0"/>
-              <a:t>10/2/2026</a:t>
+              <a:t>10/7/2026</a:t>
             </a:fld>
             <a:endParaRPr lang="en-US"/>
           </a:p>
@@ -2258,7 +2325,7 @@
           <a:p>
             <a:fld id="{5BCAD085-E8A6-8845-BD4E-CB4CCA059FC4}" type="datetimeFigureOut">
               <a:rPr lang="en-US" smtClean="0"/>
-              <a:t>10/2/2026</a:t>
+              <a:t>10/7/2026</a:t>
             </a:fld>
             <a:endParaRPr lang="en-US"/>
           </a:p>
@@ -2510,7 +2577,7 @@
           <a:p>
             <a:fld id="{5BCAD085-E8A6-8845-BD4E-CB4CCA059FC4}" type="datetimeFigureOut">
               <a:rPr lang="en-US" smtClean="0"/>
-              <a:t>10/2/2026</a:t>
+              <a:t>10/7/2026</a:t>
             </a:fld>
             <a:endParaRPr lang="en-US"/>
           </a:p>
@@ -2721,7 +2788,7 @@
           <a:p>
             <a:fld id="{5BCAD085-E8A6-8845-BD4E-CB4CCA059FC4}" type="datetimeFigureOut">
               <a:rPr lang="en-US" smtClean="0"/>
-              <a:t>10/2/2026</a:t>
+              <a:t>10/7/2026</a:t>
             </a:fld>
             <a:endParaRPr lang="en-US"/>
           </a:p>
@@ -5797,6 +5864,7 @@
               </a:defRPr>
             </a:pPr>
             <a:r>
+              <a:rPr dirty="0"/>
               <a:t>CRS_DEP_TIME</a:t>
             </a:r>
           </a:p>
@@ -6284,8 +6352,8 @@
         </p:nvSpPr>
         <p:spPr>
           <a:xfrm>
-            <a:off x="822959" y="2240280"/>
-            <a:ext cx="3108960" cy="594360"/>
+            <a:off x="1181600" y="2240280"/>
+            <a:ext cx="2391681" cy="323165"/>
           </a:xfrm>
           <a:prstGeom prst="rect">
             <a:avLst/>
@@ -6306,8 +6374,22 @@
               </a:defRPr>
             </a:pPr>
             <a:r>
-              <a:t>Valeurs manquantes</a:t>
-            </a:r>
+              <a:rPr lang="fr-CA" dirty="0"/>
+              <a:t>Aucune v</a:t>
+            </a:r>
+            <a:r>
+              <a:rPr dirty="0" err="1"/>
+              <a:t>aleurs</a:t>
+            </a:r>
+            <a:r>
+              <a:rPr dirty="0"/>
+              <a:t> </a:t>
+            </a:r>
+            <a:r>
+              <a:rPr dirty="0" err="1"/>
+              <a:t>manquantes</a:t>
+            </a:r>
+            <a:endParaRPr dirty="0"/>
           </a:p>
         </p:txBody>
       </p:sp>
@@ -6422,8 +6504,18 @@
               </a:defRPr>
             </a:pPr>
             <a:r>
-              <a:t>Encodage nécessaire</a:t>
-            </a:r>
+              <a:rPr dirty="0" err="1"/>
+              <a:t>Encodage</a:t>
+            </a:r>
+            <a:r>
+              <a:rPr dirty="0"/>
+              <a:t> </a:t>
+            </a:r>
+            <a:r>
+              <a:rPr dirty="0" err="1"/>
+              <a:t>nécessaire</a:t>
+            </a:r>
+            <a:endParaRPr dirty="0"/>
           </a:p>
         </p:txBody>
       </p:sp>
@@ -6516,8 +6608,8 @@
         </p:nvSpPr>
         <p:spPr>
           <a:xfrm>
-            <a:off x="8229600" y="2240280"/>
-            <a:ext cx="3108960" cy="594360"/>
+            <a:off x="8113273" y="2240280"/>
+            <a:ext cx="3341619" cy="323165"/>
           </a:xfrm>
           <a:prstGeom prst="rect">
             <a:avLst/>
@@ -6538,8 +6630,18 @@
               </a:defRPr>
             </a:pPr>
             <a:r>
-              <a:t>Redondance possible</a:t>
-            </a:r>
+              <a:rPr dirty="0" err="1"/>
+              <a:t>Redondance</a:t>
+            </a:r>
+            <a:r>
+              <a:rPr dirty="0"/>
+              <a:t> possible</a:t>
+            </a:r>
+            <a:r>
+              <a:rPr lang="fr-CA" dirty="0"/>
+              <a:t> certaines colonnes</a:t>
+            </a:r>
+            <a:endParaRPr dirty="0"/>
           </a:p>
         </p:txBody>
       </p:sp>
@@ -7318,8 +7420,8 @@
         </p:nvSpPr>
         <p:spPr>
           <a:xfrm>
-            <a:off x="914400" y="4069080"/>
-            <a:ext cx="10332720" cy="1005840"/>
+            <a:off x="2333390" y="4069080"/>
+            <a:ext cx="7494744" cy="461665"/>
           </a:xfrm>
           <a:prstGeom prst="rect">
             <a:avLst/>
@@ -7340,7 +7442,20 @@
               </a:defRPr>
             </a:pPr>
             <a:r>
-              <a:t>Nettoyer  •  Transformer  •  Tester  •  Comparer</a:t>
+              <a:rPr lang="fr-CA" dirty="0"/>
+              <a:t>Analyse </a:t>
+            </a:r>
+            <a:r>
+              <a:rPr lang="en-US" dirty="0"/>
+              <a:t>• </a:t>
+            </a:r>
+            <a:r>
+              <a:rPr dirty="0" err="1"/>
+              <a:t>Nettoyer</a:t>
+            </a:r>
+            <a:r>
+              <a:rPr dirty="0"/>
+              <a:t>  •  Transformer  •  Tester  •  Comparer</a:t>
             </a:r>
           </a:p>
         </p:txBody>

--- a/PROJET/Presentation_Volarus_Condensee_v3.pptx
+++ b/PROJET/Presentation_Volarus_Condensee_v3.pptx
@@ -8,10 +8,11 @@
     <p:sldId id="256" r:id="rId2"/>
     <p:sldId id="257" r:id="rId3"/>
     <p:sldId id="258" r:id="rId4"/>
-    <p:sldId id="259" r:id="rId5"/>
+    <p:sldId id="263" r:id="rId5"/>
     <p:sldId id="260" r:id="rId6"/>
-    <p:sldId id="261" r:id="rId7"/>
-    <p:sldId id="262" r:id="rId8"/>
+    <p:sldId id="264" r:id="rId7"/>
+    <p:sldId id="261" r:id="rId8"/>
+    <p:sldId id="262" r:id="rId9"/>
   </p:sldIdLst>
   <p:sldSz cx="12192000" cy="6858000"/>
   <p:notesSz cx="6858000" cy="9144000"/>
@@ -132,7 +133,7 @@
 <file path=ppt/revisionInfo.xml><?xml version="1.0" encoding="utf-8"?>
 <p1510:revInfo xmlns:a="http://schemas.openxmlformats.org/drawingml/2006/main" xmlns:r="http://schemas.openxmlformats.org/officeDocument/2006/relationships" xmlns:p1510="http://schemas.microsoft.com/office/powerpoint/2015/10/main">
   <p1510:revLst>
-    <p1510:client id="{B0E2BBC6-32AC-4129-AF59-927F125864FC}" v="1" dt="2026-10-07T20:36:30.432"/>
+    <p1510:client id="{B0E2BBC6-32AC-4129-AF59-927F125864FC}" v="5" dt="2026-10-20T14:52:13.176"/>
   </p1510:revLst>
 </p1510:revInfo>
 </file>
@@ -141,26 +142,130 @@
 <pc:chgInfo xmlns:a="http://schemas.openxmlformats.org/drawingml/2006/main" xmlns:r="http://schemas.openxmlformats.org/officeDocument/2006/relationships" xmlns:ac="http://schemas.microsoft.com/office/drawing/2013/main/command" xmlns:pc="http://schemas.microsoft.com/office/powerpoint/2013/main/command">
   <pc:docChgLst>
     <pc:chgData name="alex seguin" userId="c47c39593cf1707d" providerId="LiveId" clId="{56C82717-B78C-4079-A034-267DC212A18F}"/>
-    <pc:docChg chg="modSld sldOrd">
-      <pc:chgData name="alex seguin" userId="c47c39593cf1707d" providerId="LiveId" clId="{56C82717-B78C-4079-A034-267DC212A18F}" dt="2026-10-07T20:36:30.431" v="54"/>
+    <pc:docChg chg="custSel addSld delSld modSld sldOrd">
+      <pc:chgData name="alex seguin" userId="c47c39593cf1707d" providerId="LiveId" clId="{56C82717-B78C-4079-A034-267DC212A18F}" dt="2026-10-21T14:04:53.846" v="385" actId="20577"/>
       <pc:docMkLst>
         <pc:docMk/>
       </pc:docMkLst>
-      <pc:sldChg chg="ord">
-        <pc:chgData name="alex seguin" userId="c47c39593cf1707d" providerId="LiveId" clId="{56C82717-B78C-4079-A034-267DC212A18F}" dt="2026-10-06T13:09:06.665" v="1"/>
+      <pc:sldChg chg="addSp delSp modSp mod">
+        <pc:chgData name="alex seguin" userId="c47c39593cf1707d" providerId="LiveId" clId="{56C82717-B78C-4079-A034-267DC212A18F}" dt="2026-10-20T14:58:11.379" v="293" actId="1076"/>
         <pc:sldMkLst>
           <pc:docMk/>
-          <pc:sldMk cId="0" sldId="259"/>
+          <pc:sldMk cId="0" sldId="260"/>
         </pc:sldMkLst>
+        <pc:spChg chg="mod">
+          <ac:chgData name="alex seguin" userId="c47c39593cf1707d" providerId="LiveId" clId="{56C82717-B78C-4079-A034-267DC212A18F}" dt="2026-10-20T14:56:55.496" v="284" actId="20577"/>
+          <ac:spMkLst>
+            <pc:docMk/>
+            <pc:sldMk cId="0" sldId="260"/>
+            <ac:spMk id="2" creationId="{00000000-0000-0000-0000-000000000000}"/>
+          </ac:spMkLst>
+        </pc:spChg>
+        <pc:spChg chg="mod">
+          <ac:chgData name="alex seguin" userId="c47c39593cf1707d" providerId="LiveId" clId="{56C82717-B78C-4079-A034-267DC212A18F}" dt="2026-10-20T14:37:52.547" v="223" actId="20577"/>
+          <ac:spMkLst>
+            <pc:docMk/>
+            <pc:sldMk cId="0" sldId="260"/>
+            <ac:spMk id="6" creationId="{00000000-0000-0000-0000-000000000000}"/>
+          </ac:spMkLst>
+        </pc:spChg>
+        <pc:spChg chg="mod">
+          <ac:chgData name="alex seguin" userId="c47c39593cf1707d" providerId="LiveId" clId="{56C82717-B78C-4079-A034-267DC212A18F}" dt="2026-10-20T14:38:16.560" v="232" actId="20577"/>
+          <ac:spMkLst>
+            <pc:docMk/>
+            <pc:sldMk cId="0" sldId="260"/>
+            <ac:spMk id="8" creationId="{00000000-0000-0000-0000-000000000000}"/>
+          </ac:spMkLst>
+        </pc:spChg>
+        <pc:spChg chg="mod">
+          <ac:chgData name="alex seguin" userId="c47c39593cf1707d" providerId="LiveId" clId="{56C82717-B78C-4079-A034-267DC212A18F}" dt="2026-10-20T14:38:33.513" v="238" actId="20577"/>
+          <ac:spMkLst>
+            <pc:docMk/>
+            <pc:sldMk cId="0" sldId="260"/>
+            <ac:spMk id="10" creationId="{00000000-0000-0000-0000-000000000000}"/>
+          </ac:spMkLst>
+        </pc:spChg>
+        <pc:spChg chg="del">
+          <ac:chgData name="alex seguin" userId="c47c39593cf1707d" providerId="LiveId" clId="{56C82717-B78C-4079-A034-267DC212A18F}" dt="2026-10-20T14:57:48.087" v="286" actId="478"/>
+          <ac:spMkLst>
+            <pc:docMk/>
+            <pc:sldMk cId="0" sldId="260"/>
+            <ac:spMk id="15" creationId="{00000000-0000-0000-0000-000000000000}"/>
+          </ac:spMkLst>
+        </pc:spChg>
+        <pc:spChg chg="del">
+          <ac:chgData name="alex seguin" userId="c47c39593cf1707d" providerId="LiveId" clId="{56C82717-B78C-4079-A034-267DC212A18F}" dt="2026-10-20T14:57:48.087" v="286" actId="478"/>
+          <ac:spMkLst>
+            <pc:docMk/>
+            <pc:sldMk cId="0" sldId="260"/>
+            <ac:spMk id="16" creationId="{00000000-0000-0000-0000-000000000000}"/>
+          </ac:spMkLst>
+        </pc:spChg>
+        <pc:spChg chg="del">
+          <ac:chgData name="alex seguin" userId="c47c39593cf1707d" providerId="LiveId" clId="{56C82717-B78C-4079-A034-267DC212A18F}" dt="2026-10-20T14:57:48.087" v="286" actId="478"/>
+          <ac:spMkLst>
+            <pc:docMk/>
+            <pc:sldMk cId="0" sldId="260"/>
+            <ac:spMk id="17" creationId="{00000000-0000-0000-0000-000000000000}"/>
+          </ac:spMkLst>
+        </pc:spChg>
+        <pc:spChg chg="del mod">
+          <ac:chgData name="alex seguin" userId="c47c39593cf1707d" providerId="LiveId" clId="{56C82717-B78C-4079-A034-267DC212A18F}" dt="2026-10-20T14:57:48.087" v="286" actId="478"/>
+          <ac:spMkLst>
+            <pc:docMk/>
+            <pc:sldMk cId="0" sldId="260"/>
+            <ac:spMk id="18" creationId="{00000000-0000-0000-0000-000000000000}"/>
+          </ac:spMkLst>
+        </pc:spChg>
+        <pc:spChg chg="del">
+          <ac:chgData name="alex seguin" userId="c47c39593cf1707d" providerId="LiveId" clId="{56C82717-B78C-4079-A034-267DC212A18F}" dt="2026-10-20T14:57:42.407" v="285" actId="478"/>
+          <ac:spMkLst>
+            <pc:docMk/>
+            <pc:sldMk cId="0" sldId="260"/>
+            <ac:spMk id="19" creationId="{00000000-0000-0000-0000-000000000000}"/>
+          </ac:spMkLst>
+        </pc:spChg>
+        <pc:spChg chg="del mod">
+          <ac:chgData name="alex seguin" userId="c47c39593cf1707d" providerId="LiveId" clId="{56C82717-B78C-4079-A034-267DC212A18F}" dt="2026-10-20T14:57:48.087" v="286" actId="478"/>
+          <ac:spMkLst>
+            <pc:docMk/>
+            <pc:sldMk cId="0" sldId="260"/>
+            <ac:spMk id="20" creationId="{00000000-0000-0000-0000-000000000000}"/>
+          </ac:spMkLst>
+        </pc:spChg>
+        <pc:spChg chg="del mod">
+          <ac:chgData name="alex seguin" userId="c47c39593cf1707d" providerId="LiveId" clId="{56C82717-B78C-4079-A034-267DC212A18F}" dt="2026-10-20T14:58:06.998" v="292" actId="478"/>
+          <ac:spMkLst>
+            <pc:docMk/>
+            <pc:sldMk cId="0" sldId="260"/>
+            <ac:spMk id="21" creationId="{00000000-0000-0000-0000-000000000000}"/>
+          </ac:spMkLst>
+        </pc:spChg>
+        <pc:spChg chg="add del mod">
+          <ac:chgData name="alex seguin" userId="c47c39593cf1707d" providerId="LiveId" clId="{56C82717-B78C-4079-A034-267DC212A18F}" dt="2026-10-20T14:39:05.990" v="241"/>
+          <ac:spMkLst>
+            <pc:docMk/>
+            <pc:sldMk cId="0" sldId="260"/>
+            <ac:spMk id="23" creationId="{33F5E9A1-93F0-7880-D11D-F04DB5562C12}"/>
+          </ac:spMkLst>
+        </pc:spChg>
+        <pc:picChg chg="add mod">
+          <ac:chgData name="alex seguin" userId="c47c39593cf1707d" providerId="LiveId" clId="{56C82717-B78C-4079-A034-267DC212A18F}" dt="2026-10-20T14:58:11.379" v="293" actId="1076"/>
+          <ac:picMkLst>
+            <pc:docMk/>
+            <pc:sldMk cId="0" sldId="260"/>
+            <ac:picMk id="24" creationId="{DC3AB369-9CE4-42C7-62CE-AF0F44415EC3}"/>
+          </ac:picMkLst>
+        </pc:picChg>
       </pc:sldChg>
       <pc:sldChg chg="modSp mod">
-        <pc:chgData name="alex seguin" userId="c47c39593cf1707d" providerId="LiveId" clId="{56C82717-B78C-4079-A034-267DC212A18F}" dt="2026-10-07T20:34:40.983" v="41" actId="20577"/>
+        <pc:chgData name="alex seguin" userId="c47c39593cf1707d" providerId="LiveId" clId="{56C82717-B78C-4079-A034-267DC212A18F}" dt="2026-10-20T18:27:15.917" v="375" actId="20577"/>
         <pc:sldMkLst>
           <pc:docMk/>
           <pc:sldMk cId="0" sldId="261"/>
         </pc:sldMkLst>
         <pc:spChg chg="mod">
-          <ac:chgData name="alex seguin" userId="c47c39593cf1707d" providerId="LiveId" clId="{56C82717-B78C-4079-A034-267DC212A18F}" dt="2026-10-07T20:34:00.023" v="10" actId="20577"/>
+          <ac:chgData name="alex seguin" userId="c47c39593cf1707d" providerId="LiveId" clId="{56C82717-B78C-4079-A034-267DC212A18F}" dt="2026-10-20T15:37:45.356" v="353" actId="20577"/>
           <ac:spMkLst>
             <pc:docMk/>
             <pc:sldMk cId="0" sldId="261"/>
@@ -168,28 +273,154 @@
           </ac:spMkLst>
         </pc:spChg>
         <pc:spChg chg="mod">
-          <ac:chgData name="alex seguin" userId="c47c39593cf1707d" providerId="LiveId" clId="{56C82717-B78C-4079-A034-267DC212A18F}" dt="2026-10-07T20:34:40.983" v="41" actId="20577"/>
+          <ac:chgData name="alex seguin" userId="c47c39593cf1707d" providerId="LiveId" clId="{56C82717-B78C-4079-A034-267DC212A18F}" dt="2026-10-20T15:40:39.528" v="355" actId="20577"/>
           <ac:spMkLst>
             <pc:docMk/>
             <pc:sldMk cId="0" sldId="261"/>
             <ac:spMk id="11" creationId="{00000000-0000-0000-0000-000000000000}"/>
           </ac:spMkLst>
         </pc:spChg>
+        <pc:spChg chg="mod">
+          <ac:chgData name="alex seguin" userId="c47c39593cf1707d" providerId="LiveId" clId="{56C82717-B78C-4079-A034-267DC212A18F}" dt="2026-10-20T15:41:46.907" v="360" actId="20577"/>
+          <ac:spMkLst>
+            <pc:docMk/>
+            <pc:sldMk cId="0" sldId="261"/>
+            <ac:spMk id="14" creationId="{00000000-0000-0000-0000-000000000000}"/>
+          </ac:spMkLst>
+        </pc:spChg>
+        <pc:spChg chg="mod">
+          <ac:chgData name="alex seguin" userId="c47c39593cf1707d" providerId="LiveId" clId="{56C82717-B78C-4079-A034-267DC212A18F}" dt="2026-10-20T18:27:15.917" v="375" actId="20577"/>
+          <ac:spMkLst>
+            <pc:docMk/>
+            <pc:sldMk cId="0" sldId="261"/>
+            <ac:spMk id="17" creationId="{00000000-0000-0000-0000-000000000000}"/>
+          </ac:spMkLst>
+        </pc:spChg>
       </pc:sldChg>
       <pc:sldChg chg="modSp mod">
-        <pc:chgData name="alex seguin" userId="c47c39593cf1707d" providerId="LiveId" clId="{56C82717-B78C-4079-A034-267DC212A18F}" dt="2026-10-07T20:36:30.431" v="54"/>
+        <pc:chgData name="alex seguin" userId="c47c39593cf1707d" providerId="LiveId" clId="{56C82717-B78C-4079-A034-267DC212A18F}" dt="2026-10-21T14:04:53.846" v="385" actId="20577"/>
         <pc:sldMkLst>
           <pc:docMk/>
           <pc:sldMk cId="0" sldId="262"/>
         </pc:sldMkLst>
         <pc:spChg chg="mod">
-          <ac:chgData name="alex seguin" userId="c47c39593cf1707d" providerId="LiveId" clId="{56C82717-B78C-4079-A034-267DC212A18F}" dt="2026-10-07T20:36:30.431" v="54"/>
+          <ac:chgData name="alex seguin" userId="c47c39593cf1707d" providerId="LiveId" clId="{56C82717-B78C-4079-A034-267DC212A18F}" dt="2026-10-21T14:04:53.846" v="385" actId="20577"/>
           <ac:spMkLst>
             <pc:docMk/>
             <pc:sldMk cId="0" sldId="262"/>
             <ac:spMk id="11" creationId="{00000000-0000-0000-0000-000000000000}"/>
           </ac:spMkLst>
         </pc:spChg>
+      </pc:sldChg>
+      <pc:sldChg chg="add setBg">
+        <pc:chgData name="alex seguin" userId="c47c39593cf1707d" providerId="LiveId" clId="{56C82717-B78C-4079-A034-267DC212A18F}" dt="2026-10-19T22:40:46.270" v="198"/>
+        <pc:sldMkLst>
+          <pc:docMk/>
+          <pc:sldMk cId="0" sldId="263"/>
+        </pc:sldMkLst>
+      </pc:sldChg>
+      <pc:sldChg chg="addSp delSp modSp add mod setBg">
+        <pc:chgData name="alex seguin" userId="c47c39593cf1707d" providerId="LiveId" clId="{56C82717-B78C-4079-A034-267DC212A18F}" dt="2026-10-20T15:16:33.171" v="299" actId="1076"/>
+        <pc:sldMkLst>
+          <pc:docMk/>
+          <pc:sldMk cId="0" sldId="264"/>
+        </pc:sldMkLst>
+        <pc:spChg chg="del">
+          <ac:chgData name="alex seguin" userId="c47c39593cf1707d" providerId="LiveId" clId="{56C82717-B78C-4079-A034-267DC212A18F}" dt="2026-10-20T15:16:19.847" v="295" actId="478"/>
+          <ac:spMkLst>
+            <pc:docMk/>
+            <pc:sldMk cId="0" sldId="264"/>
+            <ac:spMk id="14" creationId="{00000000-0000-0000-0000-000000000000}"/>
+          </ac:spMkLst>
+        </pc:spChg>
+        <pc:spChg chg="del">
+          <ac:chgData name="alex seguin" userId="c47c39593cf1707d" providerId="LiveId" clId="{56C82717-B78C-4079-A034-267DC212A18F}" dt="2026-10-20T15:16:14.547" v="294" actId="478"/>
+          <ac:spMkLst>
+            <pc:docMk/>
+            <pc:sldMk cId="0" sldId="264"/>
+            <ac:spMk id="15" creationId="{00000000-0000-0000-0000-000000000000}"/>
+          </ac:spMkLst>
+        </pc:spChg>
+        <pc:spChg chg="del">
+          <ac:chgData name="alex seguin" userId="c47c39593cf1707d" providerId="LiveId" clId="{56C82717-B78C-4079-A034-267DC212A18F}" dt="2026-10-20T15:16:14.547" v="294" actId="478"/>
+          <ac:spMkLst>
+            <pc:docMk/>
+            <pc:sldMk cId="0" sldId="264"/>
+            <ac:spMk id="16" creationId="{00000000-0000-0000-0000-000000000000}"/>
+          </ac:spMkLst>
+        </pc:spChg>
+        <pc:spChg chg="del">
+          <ac:chgData name="alex seguin" userId="c47c39593cf1707d" providerId="LiveId" clId="{56C82717-B78C-4079-A034-267DC212A18F}" dt="2026-10-20T15:16:14.547" v="294" actId="478"/>
+          <ac:spMkLst>
+            <pc:docMk/>
+            <pc:sldMk cId="0" sldId="264"/>
+            <ac:spMk id="17" creationId="{00000000-0000-0000-0000-000000000000}"/>
+          </ac:spMkLst>
+        </pc:spChg>
+        <pc:spChg chg="del">
+          <ac:chgData name="alex seguin" userId="c47c39593cf1707d" providerId="LiveId" clId="{56C82717-B78C-4079-A034-267DC212A18F}" dt="2026-10-20T15:16:14.547" v="294" actId="478"/>
+          <ac:spMkLst>
+            <pc:docMk/>
+            <pc:sldMk cId="0" sldId="264"/>
+            <ac:spMk id="18" creationId="{00000000-0000-0000-0000-000000000000}"/>
+          </ac:spMkLst>
+        </pc:spChg>
+        <pc:spChg chg="del">
+          <ac:chgData name="alex seguin" userId="c47c39593cf1707d" providerId="LiveId" clId="{56C82717-B78C-4079-A034-267DC212A18F}" dt="2026-10-20T15:16:14.547" v="294" actId="478"/>
+          <ac:spMkLst>
+            <pc:docMk/>
+            <pc:sldMk cId="0" sldId="264"/>
+            <ac:spMk id="19" creationId="{00000000-0000-0000-0000-000000000000}"/>
+          </ac:spMkLst>
+        </pc:spChg>
+        <pc:spChg chg="del">
+          <ac:chgData name="alex seguin" userId="c47c39593cf1707d" providerId="LiveId" clId="{56C82717-B78C-4079-A034-267DC212A18F}" dt="2026-10-20T15:16:14.547" v="294" actId="478"/>
+          <ac:spMkLst>
+            <pc:docMk/>
+            <pc:sldMk cId="0" sldId="264"/>
+            <ac:spMk id="20" creationId="{00000000-0000-0000-0000-000000000000}"/>
+          </ac:spMkLst>
+        </pc:spChg>
+        <pc:spChg chg="del">
+          <ac:chgData name="alex seguin" userId="c47c39593cf1707d" providerId="LiveId" clId="{56C82717-B78C-4079-A034-267DC212A18F}" dt="2026-10-20T15:16:14.547" v="294" actId="478"/>
+          <ac:spMkLst>
+            <pc:docMk/>
+            <pc:sldMk cId="0" sldId="264"/>
+            <ac:spMk id="22" creationId="{00000000-0000-0000-0000-000000000000}"/>
+          </ac:spMkLst>
+        </pc:spChg>
+        <pc:spChg chg="del">
+          <ac:chgData name="alex seguin" userId="c47c39593cf1707d" providerId="LiveId" clId="{56C82717-B78C-4079-A034-267DC212A18F}" dt="2026-10-20T15:16:14.547" v="294" actId="478"/>
+          <ac:spMkLst>
+            <pc:docMk/>
+            <pc:sldMk cId="0" sldId="264"/>
+            <ac:spMk id="26" creationId="{00000000-0000-0000-0000-000000000000}"/>
+          </ac:spMkLst>
+        </pc:spChg>
+        <pc:spChg chg="del">
+          <ac:chgData name="alex seguin" userId="c47c39593cf1707d" providerId="LiveId" clId="{56C82717-B78C-4079-A034-267DC212A18F}" dt="2026-10-20T15:16:14.547" v="294" actId="478"/>
+          <ac:spMkLst>
+            <pc:docMk/>
+            <pc:sldMk cId="0" sldId="264"/>
+            <ac:spMk id="27" creationId="{00000000-0000-0000-0000-000000000000}"/>
+          </ac:spMkLst>
+        </pc:spChg>
+        <pc:spChg chg="del">
+          <ac:chgData name="alex seguin" userId="c47c39593cf1707d" providerId="LiveId" clId="{56C82717-B78C-4079-A034-267DC212A18F}" dt="2026-10-20T15:16:14.547" v="294" actId="478"/>
+          <ac:spMkLst>
+            <pc:docMk/>
+            <pc:sldMk cId="0" sldId="264"/>
+            <ac:spMk id="28" creationId="{00000000-0000-0000-0000-000000000000}"/>
+          </ac:spMkLst>
+        </pc:spChg>
+        <pc:picChg chg="add mod">
+          <ac:chgData name="alex seguin" userId="c47c39593cf1707d" providerId="LiveId" clId="{56C82717-B78C-4079-A034-267DC212A18F}" dt="2026-10-20T15:16:33.171" v="299" actId="1076"/>
+          <ac:picMkLst>
+            <pc:docMk/>
+            <pc:sldMk cId="0" sldId="264"/>
+            <ac:picMk id="31" creationId="{834FF45B-2E47-ACA2-1724-27A8CA68B566}"/>
+          </ac:picMkLst>
+        </pc:picChg>
       </pc:sldChg>
     </pc:docChg>
   </pc:docChgLst>
@@ -375,7 +606,7 @@
           <a:p>
             <a:fld id="{5BCAD085-E8A6-8845-BD4E-CB4CCA059FC4}" type="datetimeFigureOut">
               <a:rPr lang="en-US" smtClean="0"/>
-              <a:t>10/7/2026</a:t>
+              <a:t>10/21/2026</a:t>
             </a:fld>
             <a:endParaRPr lang="en-US"/>
           </a:p>
@@ -543,7 +774,7 @@
           <a:p>
             <a:fld id="{5BCAD085-E8A6-8845-BD4E-CB4CCA059FC4}" type="datetimeFigureOut">
               <a:rPr lang="en-US" smtClean="0"/>
-              <a:t>10/7/2026</a:t>
+              <a:t>10/21/2026</a:t>
             </a:fld>
             <a:endParaRPr lang="en-US"/>
           </a:p>
@@ -721,7 +952,7 @@
           <a:p>
             <a:fld id="{5BCAD085-E8A6-8845-BD4E-CB4CCA059FC4}" type="datetimeFigureOut">
               <a:rPr lang="en-US" smtClean="0"/>
-              <a:t>10/7/2026</a:t>
+              <a:t>10/21/2026</a:t>
             </a:fld>
             <a:endParaRPr lang="en-US"/>
           </a:p>
@@ -889,7 +1120,7 @@
           <a:p>
             <a:fld id="{5BCAD085-E8A6-8845-BD4E-CB4CCA059FC4}" type="datetimeFigureOut">
               <a:rPr lang="en-US" smtClean="0"/>
-              <a:t>10/7/2026</a:t>
+              <a:t>10/21/2026</a:t>
             </a:fld>
             <a:endParaRPr lang="en-US"/>
           </a:p>
@@ -1134,7 +1365,7 @@
           <a:p>
             <a:fld id="{5BCAD085-E8A6-8845-BD4E-CB4CCA059FC4}" type="datetimeFigureOut">
               <a:rPr lang="en-US" smtClean="0"/>
-              <a:t>10/7/2026</a:t>
+              <a:t>10/21/2026</a:t>
             </a:fld>
             <a:endParaRPr lang="en-US"/>
           </a:p>
@@ -1419,7 +1650,7 @@
           <a:p>
             <a:fld id="{5BCAD085-E8A6-8845-BD4E-CB4CCA059FC4}" type="datetimeFigureOut">
               <a:rPr lang="en-US" smtClean="0"/>
-              <a:t>10/7/2026</a:t>
+              <a:t>10/21/2026</a:t>
             </a:fld>
             <a:endParaRPr lang="en-US"/>
           </a:p>
@@ -1838,7 +2069,7 @@
           <a:p>
             <a:fld id="{5BCAD085-E8A6-8845-BD4E-CB4CCA059FC4}" type="datetimeFigureOut">
               <a:rPr lang="en-US" smtClean="0"/>
-              <a:t>10/7/2026</a:t>
+              <a:t>10/21/2026</a:t>
             </a:fld>
             <a:endParaRPr lang="en-US"/>
           </a:p>
@@ -1955,7 +2186,7 @@
           <a:p>
             <a:fld id="{5BCAD085-E8A6-8845-BD4E-CB4CCA059FC4}" type="datetimeFigureOut">
               <a:rPr lang="en-US" smtClean="0"/>
-              <a:t>10/7/2026</a:t>
+              <a:t>10/21/2026</a:t>
             </a:fld>
             <a:endParaRPr lang="en-US"/>
           </a:p>
@@ -2050,7 +2281,7 @@
           <a:p>
             <a:fld id="{5BCAD085-E8A6-8845-BD4E-CB4CCA059FC4}" type="datetimeFigureOut">
               <a:rPr lang="en-US" smtClean="0"/>
-              <a:t>10/7/2026</a:t>
+              <a:t>10/21/2026</a:t>
             </a:fld>
             <a:endParaRPr lang="en-US"/>
           </a:p>
@@ -2325,7 +2556,7 @@
           <a:p>
             <a:fld id="{5BCAD085-E8A6-8845-BD4E-CB4CCA059FC4}" type="datetimeFigureOut">
               <a:rPr lang="en-US" smtClean="0"/>
-              <a:t>10/7/2026</a:t>
+              <a:t>10/21/2026</a:t>
             </a:fld>
             <a:endParaRPr lang="en-US"/>
           </a:p>
@@ -2577,7 +2808,7 @@
           <a:p>
             <a:fld id="{5BCAD085-E8A6-8845-BD4E-CB4CCA059FC4}" type="datetimeFigureOut">
               <a:rPr lang="en-US" smtClean="0"/>
-              <a:t>10/7/2026</a:t>
+              <a:t>10/21/2026</a:t>
             </a:fld>
             <a:endParaRPr lang="en-US"/>
           </a:p>
@@ -2788,7 +3019,7 @@
           <a:p>
             <a:fld id="{5BCAD085-E8A6-8845-BD4E-CB4CCA059FC4}" type="datetimeFigureOut">
               <a:rPr lang="en-US" smtClean="0"/>
-              <a:t>10/7/2026</a:t>
+              <a:t>10/21/2026</a:t>
             </a:fld>
             <a:endParaRPr lang="en-US"/>
           </a:p>
@@ -3571,8 +3802,10 @@
               </a:defRPr>
             </a:pPr>
             <a:r>
+              <a:rPr dirty="0" err="1"/>
               <a:t>Volarus</a:t>
             </a:r>
+            <a:endParaRPr dirty="0"/>
           </a:p>
           <a:p>
             <a:pPr algn="ctr">
@@ -3583,8 +3816,14 @@
               </a:defRPr>
             </a:pPr>
             <a:r>
-              <a:t>✈ Compagnie aérienne</a:t>
-            </a:r>
+              <a:rPr dirty="0"/>
+              <a:t>✈ Compagnie </a:t>
+            </a:r>
+            <a:r>
+              <a:rPr dirty="0" err="1"/>
+              <a:t>aérienne</a:t>
+            </a:r>
+            <a:endParaRPr dirty="0"/>
           </a:p>
         </p:txBody>
       </p:sp>
@@ -4580,14 +4819,6 @@
 <file path=ppt/slides/slide4.xml><?xml version="1.0" encoding="utf-8"?>
 <p:sld xmlns:a="http://schemas.openxmlformats.org/drawingml/2006/main" xmlns:r="http://schemas.openxmlformats.org/officeDocument/2006/relationships" xmlns:p="http://schemas.openxmlformats.org/presentationml/2006/main">
   <p:cSld>
-    <p:bg>
-      <p:bgPr>
-        <a:solidFill>
-          <a:srgbClr val="FFFFFF"/>
-        </a:solidFill>
-        <a:effectLst/>
-      </p:bgPr>
-    </p:bg>
     <p:spTree>
       <p:nvGrpSpPr>
         <p:cNvPr id="1" name=""/>
@@ -4691,8 +4922,8 @@
         </p:nvSpPr>
         <p:spPr>
           <a:xfrm>
-            <a:off x="2504557" y="1417088"/>
-            <a:ext cx="1702582" cy="384721"/>
+            <a:off x="1740697" y="1355533"/>
+            <a:ext cx="3230308" cy="507831"/>
           </a:xfrm>
           <a:prstGeom prst="rect">
             <a:avLst/>
@@ -4700,7 +4931,7 @@
           <a:noFill/>
         </p:spPr>
         <p:txBody>
-          <a:bodyPr wrap="none">
+          <a:bodyPr wrap="none" anchor="ctr">
             <a:spAutoFit/>
           </a:bodyPr>
           <a:lstStyle/>
@@ -4713,14 +4944,26 @@
               </a:defRPr>
             </a:pPr>
             <a:r>
-              <a:rPr dirty="0"/>
-              <a:t>BTS / </a:t>
-            </a:r>
-            <a:r>
-              <a:rPr dirty="0" err="1"/>
-              <a:t>TranStats</a:t>
-            </a:r>
-            <a:endParaRPr lang="fr-CA" dirty="0"/>
+              <a:rPr sz="1700" b="1" dirty="0">
+                <a:solidFill>
+                  <a:srgbClr val="1F3B56"/>
+                </a:solidFill>
+                <a:latin typeface="Aptos"/>
+              </a:rPr>
+              <a:t>Flight Delay Dataset 2018-2022</a:t>
+            </a:r>
+          </a:p>
+          <a:p>
+            <a:pPr algn="ctr"/>
+            <a:r>
+              <a:rPr sz="1000" b="1" dirty="0">
+                <a:solidFill>
+                  <a:srgbClr val="2D2D2D"/>
+                </a:solidFill>
+                <a:latin typeface="Aptos"/>
+              </a:rPr>
+              <a:t>Trouvé sur Kaggle</a:t>
+            </a:r>
           </a:p>
         </p:txBody>
       </p:sp>
@@ -4762,46 +5005,21 @@
           </a:fontRef>
         </p:style>
         <p:txBody>
-          <a:bodyPr rtlCol="0" anchor="ctr"/>
+          <a:bodyPr wrap="square" rtlCol="0" anchor="ctr"/>
           <a:lstStyle/>
           <a:p>
             <a:pPr algn="ctr"/>
+            <a:r>
+              <a:rPr sz="1700" b="1">
+                <a:solidFill>
+                  <a:srgbClr val="1F3B56"/>
+                </a:solidFill>
+                <a:latin typeface="Aptos"/>
+              </a:rPr>
+              <a:t>29 193 782 vols au départ
+1 000 000 retenus pour le projet</a:t>
+            </a:r>
             <a:endParaRPr/>
-          </a:p>
-        </p:txBody>
-      </p:sp>
-      <p:sp>
-        <p:nvSpPr>
-          <p:cNvPr id="6" name="TextBox 5"/>
-          <p:cNvSpPr txBox="1"/>
-          <p:nvPr/>
-        </p:nvSpPr>
-        <p:spPr>
-          <a:xfrm>
-            <a:off x="6355079" y="1545336"/>
-            <a:ext cx="5029200" cy="502920"/>
-          </a:xfrm>
-          <a:prstGeom prst="rect">
-            <a:avLst/>
-          </a:prstGeom>
-          <a:noFill/>
-        </p:spPr>
-        <p:txBody>
-          <a:bodyPr wrap="none">
-            <a:spAutoFit/>
-          </a:bodyPr>
-          <a:lstStyle/>
-          <a:p>
-            <a:pPr algn="ctr">
-              <a:defRPr sz="1900" b="1">
-                <a:solidFill>
-                  <a:srgbClr val="193755"/>
-                </a:solidFill>
-              </a:defRPr>
-            </a:pPr>
-            <a:r>
-              <a:t>602 953 observations</a:t>
-            </a:r>
           </a:p>
         </p:txBody>
       </p:sp>
@@ -4859,8 +5077,8 @@
         </p:nvSpPr>
         <p:spPr>
           <a:xfrm>
-            <a:off x="822960" y="2642616"/>
-            <a:ext cx="3200400" cy="502920"/>
+            <a:off x="1725084" y="2642616"/>
+            <a:ext cx="1396151" cy="384721"/>
           </a:xfrm>
           <a:prstGeom prst="rect">
             <a:avLst/>
@@ -4881,7 +5099,12 @@
               </a:defRPr>
             </a:pPr>
             <a:r>
-              <a:t>25 variables</a:t>
+              <a:rPr lang="en-US" dirty="0"/>
+              <a:t>61</a:t>
+            </a:r>
+            <a:r>
+              <a:rPr dirty="0"/>
+              <a:t> variables</a:t>
             </a:r>
           </a:p>
         </p:txBody>
@@ -4962,6 +5185,7 @@
               </a:defRPr>
             </a:pPr>
             <a:r>
+              <a:rPr dirty="0"/>
               <a:t>CSV</a:t>
             </a:r>
           </a:p>
@@ -5050,14 +5274,179 @@
       </p:sp>
       <p:sp>
         <p:nvSpPr>
-          <p:cNvPr id="13" name="Rounded Rectangle 12"/>
+          <p:cNvPr id="15" name="TextBox 14"/>
+          <p:cNvSpPr txBox="1"/>
+          <p:nvPr/>
+        </p:nvSpPr>
+        <p:spPr>
+          <a:xfrm>
+            <a:off x="594360" y="6565392"/>
+            <a:ext cx="10972800" cy="182880"/>
+          </a:xfrm>
+          <a:prstGeom prst="rect">
+            <a:avLst/>
+          </a:prstGeom>
+          <a:noFill/>
+        </p:spPr>
+        <p:txBody>
+          <a:bodyPr wrap="none">
+            <a:spAutoFit/>
+          </a:bodyPr>
+          <a:lstStyle/>
+          <a:p>
+            <a:pPr>
+              <a:defRPr sz="800">
+                <a:solidFill>
+                  <a:srgbClr val="828C96"/>
+                </a:solidFill>
+              </a:defRPr>
+            </a:pPr>
+            <a:r>
+              <a:t>VOLARUS • PROJET IA • ÉQUIPE 14                                      4</a:t>
+            </a:r>
+          </a:p>
+        </p:txBody>
+      </p:sp>
+      <p:sp>
+        <p:nvSpPr>
+          <p:cNvPr id="18" name="Rounded Rectangle 17"/>
           <p:cNvSpPr/>
           <p:nvPr/>
         </p:nvSpPr>
         <p:spPr>
           <a:xfrm>
-            <a:off x="914400" y="3703320"/>
-            <a:ext cx="10332720" cy="1417320"/>
+            <a:off x="3512820" y="5413248"/>
+            <a:ext cx="5166360" cy="960120"/>
+          </a:xfrm>
+          <a:prstGeom prst="roundRect">
+            <a:avLst/>
+          </a:prstGeom>
+          <a:solidFill>
+            <a:srgbClr val="F7FAFD"/>
+          </a:solidFill>
+          <a:ln>
+            <a:solidFill>
+              <a:srgbClr val="50AA6E"/>
+            </a:solidFill>
+          </a:ln>
+        </p:spPr>
+        <p:style>
+          <a:lnRef idx="1">
+            <a:schemeClr val="accent1"/>
+          </a:lnRef>
+          <a:fillRef idx="3">
+            <a:schemeClr val="accent1"/>
+          </a:fillRef>
+          <a:effectRef idx="2">
+            <a:schemeClr val="accent1"/>
+          </a:effectRef>
+          <a:fontRef idx="minor">
+            <a:schemeClr val="lt1"/>
+          </a:fontRef>
+        </p:style>
+        <p:txBody>
+          <a:bodyPr rtlCol="0" anchor="ctr"/>
+          <a:lstStyle/>
+          <a:p>
+            <a:pPr algn="ctr"/>
+            <a:endParaRPr/>
+          </a:p>
+        </p:txBody>
+      </p:sp>
+      <p:sp>
+        <p:nvSpPr>
+          <p:cNvPr id="19" name="TextBox 18"/>
+          <p:cNvSpPr txBox="1"/>
+          <p:nvPr/>
+        </p:nvSpPr>
+        <p:spPr>
+          <a:xfrm>
+            <a:off x="4187464" y="5532120"/>
+            <a:ext cx="3817071" cy="492443"/>
+          </a:xfrm>
+          <a:prstGeom prst="rect">
+            <a:avLst/>
+          </a:prstGeom>
+          <a:noFill/>
+        </p:spPr>
+        <p:txBody>
+          <a:bodyPr wrap="square" anchor="ctr">
+            <a:spAutoFit/>
+          </a:bodyPr>
+          <a:lstStyle/>
+          <a:p>
+            <a:pPr algn="ctr">
+              <a:defRPr sz="1500" b="1">
+                <a:solidFill>
+                  <a:srgbClr val="193755"/>
+                </a:solidFill>
+              </a:defRPr>
+            </a:pPr>
+            <a:r>
+              <a:rPr sz="1600" b="1" dirty="0">
+                <a:solidFill>
+                  <a:srgbClr val="1F3B56"/>
+                </a:solidFill>
+                <a:latin typeface="Aptos"/>
+              </a:rPr>
+              <a:t>Données </a:t>
+            </a:r>
+            <a:r>
+              <a:rPr sz="1600" b="1" dirty="0" err="1">
+                <a:solidFill>
+                  <a:srgbClr val="1F3B56"/>
+                </a:solidFill>
+                <a:latin typeface="Aptos"/>
+              </a:rPr>
+              <a:t>couvrant</a:t>
+            </a:r>
+            <a:r>
+              <a:rPr sz="1600" b="1" dirty="0">
+                <a:solidFill>
+                  <a:srgbClr val="1F3B56"/>
+                </a:solidFill>
+                <a:latin typeface="Aptos"/>
+              </a:rPr>
+              <a:t> la </a:t>
+            </a:r>
+            <a:r>
+              <a:rPr sz="1600" b="1" dirty="0" err="1">
+                <a:solidFill>
+                  <a:srgbClr val="1F3B56"/>
+                </a:solidFill>
+                <a:latin typeface="Aptos"/>
+              </a:rPr>
+              <a:t>période</a:t>
+            </a:r>
+            <a:r>
+              <a:rPr sz="1600" b="1" dirty="0">
+                <a:solidFill>
+                  <a:srgbClr val="1F3B56"/>
+                </a:solidFill>
+                <a:latin typeface="Aptos"/>
+              </a:rPr>
+              <a:t> 2018–2022</a:t>
+            </a:r>
+            <a:endParaRPr dirty="0"/>
+          </a:p>
+        </p:txBody>
+      </p:sp>
+      <p:sp>
+        <p:nvSpPr>
+          <p:cNvPr id="14" name="Rounded Rectangle 8">
+            <a:extLst>
+              <a:ext uri="{FF2B5EF4-FFF2-40B4-BE49-F238E27FC236}">
+                <a16:creationId xmlns:a16="http://schemas.microsoft.com/office/drawing/2014/main" id="{F259FD9A-4259-4ED1-9C21-006D72410430}"/>
+              </a:ext>
+            </a:extLst>
+          </p:cNvPr>
+          <p:cNvSpPr/>
+          <p:nvPr/>
+        </p:nvSpPr>
+        <p:spPr>
+          <a:xfrm>
+            <a:off x="4205752" y="3735324"/>
+            <a:ext cx="3803904" cy="1065276"/>
           </a:xfrm>
           <a:prstGeom prst="roundRect">
             <a:avLst/>
@@ -5089,229 +5478,46 @@
           <a:bodyPr rtlCol="0" anchor="ctr"/>
           <a:lstStyle/>
           <a:p>
-            <a:pPr algn="ctr"/>
-            <a:endParaRPr/>
-          </a:p>
-        </p:txBody>
-      </p:sp>
-      <p:sp>
-        <p:nvSpPr>
-          <p:cNvPr id="14" name="TextBox 13"/>
-          <p:cNvSpPr txBox="1"/>
-          <p:nvPr/>
-        </p:nvSpPr>
-        <p:spPr>
-          <a:xfrm>
-            <a:off x="1188720" y="3977639"/>
-            <a:ext cx="9784080" cy="914400"/>
-          </a:xfrm>
-          <a:prstGeom prst="rect">
-            <a:avLst/>
-          </a:prstGeom>
-          <a:noFill/>
-        </p:spPr>
-        <p:txBody>
-          <a:bodyPr wrap="none">
-            <a:spAutoFit/>
-          </a:bodyPr>
-          <a:lstStyle/>
-          <a:p>
             <a:pPr algn="ctr">
-              <a:defRPr sz="2100" b="1">
+              <a:defRPr sz="1900" b="1">
                 <a:solidFill>
                   <a:srgbClr val="193755"/>
                 </a:solidFill>
               </a:defRPr>
             </a:pPr>
             <a:r>
-              <a:t>JEU DE DONNÉES PERSONNALISÉ</a:t>
-            </a:r>
-          </a:p>
-          <a:p>
-            <a:pPr algn="ctr">
-              <a:defRPr sz="1800">
-                <a:solidFill>
-                  <a:srgbClr val="23282D"/>
-                </a:solidFill>
-              </a:defRPr>
-            </a:pPr>
-            <a:r>
-              <a:t>Variables choisies selon notre problématique</a:t>
-            </a:r>
-          </a:p>
-        </p:txBody>
-      </p:sp>
-      <p:sp>
-        <p:nvSpPr>
-          <p:cNvPr id="15" name="TextBox 14"/>
-          <p:cNvSpPr txBox="1"/>
-          <p:nvPr/>
-        </p:nvSpPr>
-        <p:spPr>
-          <a:xfrm>
-            <a:off x="594360" y="6565392"/>
-            <a:ext cx="10972800" cy="182880"/>
-          </a:xfrm>
-          <a:prstGeom prst="rect">
-            <a:avLst/>
-          </a:prstGeom>
-          <a:noFill/>
-        </p:spPr>
-        <p:txBody>
-          <a:bodyPr wrap="none">
-            <a:spAutoFit/>
-          </a:bodyPr>
-          <a:lstStyle/>
-          <a:p>
-            <a:pPr>
-              <a:defRPr sz="800">
-                <a:solidFill>
-                  <a:srgbClr val="828C96"/>
-                </a:solidFill>
-              </a:defRPr>
-            </a:pPr>
-            <a:r>
-              <a:t>VOLARUS • PROJET IA • ÉQUIPE 14                                      4</a:t>
-            </a:r>
-          </a:p>
-        </p:txBody>
-      </p:sp>
-      <p:sp>
-        <p:nvSpPr>
-          <p:cNvPr id="18" name="Rounded Rectangle 17"/>
-          <p:cNvSpPr/>
-          <p:nvPr/>
-        </p:nvSpPr>
-        <p:spPr>
-          <a:xfrm>
-            <a:off x="3512820" y="5413248"/>
-            <a:ext cx="5166360" cy="960120"/>
-          </a:xfrm>
-          <a:prstGeom prst="roundRect">
-            <a:avLst/>
-          </a:prstGeom>
-          <a:solidFill>
-            <a:srgbClr val="F7FAFD"/>
-          </a:solidFill>
-          <a:ln>
-            <a:solidFill>
-              <a:srgbClr val="50AA6E"/>
-            </a:solidFill>
-          </a:ln>
-        </p:spPr>
-        <p:style>
-          <a:lnRef idx="1">
-            <a:schemeClr val="accent1"/>
-          </a:lnRef>
-          <a:fillRef idx="3">
-            <a:schemeClr val="accent1"/>
-          </a:fillRef>
-          <a:effectRef idx="2">
-            <a:schemeClr val="accent1"/>
-          </a:effectRef>
-          <a:fontRef idx="minor">
-            <a:schemeClr val="lt1"/>
-          </a:fontRef>
-        </p:style>
-        <p:txBody>
-          <a:bodyPr rtlCol="0" anchor="ctr"/>
-          <a:lstStyle/>
-          <a:p>
-            <a:pPr algn="ctr"/>
-            <a:endParaRPr/>
-          </a:p>
-        </p:txBody>
-      </p:sp>
-      <p:sp>
-        <p:nvSpPr>
-          <p:cNvPr id="19" name="TextBox 18"/>
-          <p:cNvSpPr txBox="1"/>
-          <p:nvPr/>
-        </p:nvSpPr>
-        <p:spPr>
-          <a:xfrm>
-            <a:off x="3695700" y="5532120"/>
-            <a:ext cx="4800600" cy="713232"/>
-          </a:xfrm>
-          <a:prstGeom prst="rect">
-            <a:avLst/>
-          </a:prstGeom>
-          <a:noFill/>
-        </p:spPr>
-        <p:txBody>
-          <a:bodyPr wrap="none">
-            <a:spAutoFit/>
-          </a:bodyPr>
-          <a:lstStyle/>
-          <a:p>
-            <a:pPr algn="ctr">
-              <a:defRPr sz="1500" b="1">
+              <a:rPr lang="fr-CA" sz="1900" b="1" dirty="0">
                 <a:solidFill>
                   <a:srgbClr val="193755"/>
                 </a:solidFill>
-              </a:defRPr>
-            </a:pPr>
-            <a:r>
-              <a:t>1 seul jeu de données exploré</a:t>
-            </a:r>
-          </a:p>
-          <a:p>
-            <a:pPr algn="ctr">
-              <a:defRPr sz="1100">
-                <a:solidFill>
-                  <a:srgbClr val="23282D"/>
-                </a:solidFill>
-              </a:defRPr>
-            </a:pPr>
-            <a:r>
-              <a:t>Pertinent : beaucoup de vols + nombreuses variables à analyser</a:t>
-            </a:r>
-          </a:p>
-        </p:txBody>
-      </p:sp>
-      <p:sp>
-        <p:nvSpPr>
-          <p:cNvPr id="20" name="ZoneTexte 19">
-            <a:extLst>
-              <a:ext uri="{FF2B5EF4-FFF2-40B4-BE49-F238E27FC236}">
-                <a16:creationId xmlns:a16="http://schemas.microsoft.com/office/drawing/2014/main" id="{ED0272B2-4155-1FFF-C709-A094140AAA76}"/>
-              </a:ext>
-            </a:extLst>
-          </p:cNvPr>
-          <p:cNvSpPr txBox="1"/>
-          <p:nvPr/>
-        </p:nvSpPr>
-        <p:spPr>
-          <a:xfrm>
-            <a:off x="1051560" y="1734449"/>
-            <a:ext cx="4800600" cy="538609"/>
-          </a:xfrm>
-          <a:prstGeom prst="rect">
-            <a:avLst/>
-          </a:prstGeom>
-          <a:noFill/>
-        </p:spPr>
-        <p:txBody>
-          <a:bodyPr wrap="square" rtlCol="0">
-            <a:spAutoFit/>
-          </a:bodyPr>
-          <a:lstStyle/>
-          <a:p>
-            <a:r>
-              <a:rPr lang="fr-CA" sz="1000" dirty="0"/>
-              <a:t>Bureau of Transportation </a:t>
-            </a:r>
-            <a:r>
-              <a:rPr lang="fr-CA" sz="1000" dirty="0" err="1"/>
+              </a:rPr>
+              <a:t>Bureau of transportation </a:t>
+            </a:r>
+            <a:r>
+              <a:rPr lang="fr-CA" sz="1900" b="1" dirty="0" err="1">
+                <a:solidFill>
+                  <a:srgbClr val="193755"/>
+                </a:solidFill>
+              </a:rPr>
               <a:t>Statistics</a:t>
             </a:r>
             <a:r>
-              <a:rPr lang="fr-CA" sz="1000" dirty="0"/>
-              <a:t> • Organisme Gouvernemental Américain</a:t>
-            </a:r>
-          </a:p>
-          <a:p>
-            <a:endParaRPr lang="en-US" dirty="0"/>
+              <a:rPr lang="fr-CA" sz="1900" b="1" dirty="0">
+                <a:solidFill>
+                  <a:srgbClr val="193755"/>
+                </a:solidFill>
+              </a:rPr>
+              <a:t>  </a:t>
+            </a:r>
+            <a:r>
+              <a:rPr lang="fr-CA" sz="1000" dirty="0">
+                <a:solidFill>
+                  <a:srgbClr val="2D2D2D"/>
+                </a:solidFill>
+                <a:latin typeface="Aptos"/>
+              </a:rPr>
+              <a:t>Organisme Gouvernemental Américain</a:t>
+            </a:r>
           </a:p>
         </p:txBody>
       </p:sp>
@@ -5357,7 +5563,7 @@
         <p:spPr>
           <a:xfrm>
             <a:off x="594360" y="347472"/>
-            <a:ext cx="10972800" cy="594360"/>
+            <a:ext cx="5080686" cy="553998"/>
           </a:xfrm>
           <a:prstGeom prst="rect">
             <a:avLst/>
@@ -5378,8 +5584,14 @@
               </a:defRPr>
             </a:pPr>
             <a:r>
-              <a:t>04 • VARIABLES CLÉS</a:t>
-            </a:r>
+              <a:rPr dirty="0"/>
+              <a:t>04 • VARIABLES </a:t>
+            </a:r>
+            <a:r>
+              <a:rPr lang="en-US" dirty="0"/>
+              <a:t>IMPORTANTES</a:t>
+            </a:r>
+            <a:endParaRPr dirty="0"/>
           </a:p>
         </p:txBody>
       </p:sp>
@@ -5459,6 +5671,7 @@
               </a:defRPr>
             </a:pPr>
             <a:r>
+              <a:rPr dirty="0"/>
               <a:t>VARIABLES EXPLICATIVES</a:t>
             </a:r>
           </a:p>
@@ -5518,8 +5731,8 @@
         </p:nvSpPr>
         <p:spPr>
           <a:xfrm>
-            <a:off x="1097280" y="2331720"/>
-            <a:ext cx="4480560" cy="274320"/>
+            <a:off x="2944664" y="2331720"/>
+            <a:ext cx="785793" cy="323165"/>
           </a:xfrm>
           <a:prstGeom prst="rect">
             <a:avLst/>
@@ -5540,8 +5753,10 @@
               </a:defRPr>
             </a:pPr>
             <a:r>
-              <a:t>ORIGIN_CITY_NAME</a:t>
-            </a:r>
+              <a:rPr lang="en-US" dirty="0"/>
+              <a:t>Airlines</a:t>
+            </a:r>
+            <a:endParaRPr dirty="0"/>
           </a:p>
         </p:txBody>
       </p:sp>
@@ -5599,8 +5814,8 @@
         </p:nvSpPr>
         <p:spPr>
           <a:xfrm>
-            <a:off x="1097280" y="2926080"/>
-            <a:ext cx="4480560" cy="274320"/>
+            <a:off x="3065176" y="2926080"/>
+            <a:ext cx="544766" cy="323165"/>
           </a:xfrm>
           <a:prstGeom prst="rect">
             <a:avLst/>
@@ -5621,8 +5836,10 @@
               </a:defRPr>
             </a:pPr>
             <a:r>
-              <a:t>DEST_CITY_NAME</a:t>
-            </a:r>
+              <a:rPr lang="en-US" dirty="0"/>
+              <a:t>Dest</a:t>
+            </a:r>
+            <a:endParaRPr dirty="0"/>
           </a:p>
         </p:txBody>
       </p:sp>
@@ -5680,8 +5897,8 @@
         </p:nvSpPr>
         <p:spPr>
           <a:xfrm>
-            <a:off x="1097280" y="3520440"/>
-            <a:ext cx="4480560" cy="274320"/>
+            <a:off x="3002372" y="3520440"/>
+            <a:ext cx="670376" cy="323165"/>
           </a:xfrm>
           <a:prstGeom prst="rect">
             <a:avLst/>
@@ -5702,8 +5919,10 @@
               </a:defRPr>
             </a:pPr>
             <a:r>
-              <a:t>MONTH</a:t>
-            </a:r>
+              <a:rPr lang="en-US" dirty="0"/>
+              <a:t>Origin</a:t>
+            </a:r>
+            <a:endParaRPr dirty="0"/>
           </a:p>
         </p:txBody>
       </p:sp>
@@ -5872,60 +6091,14 @@
       </p:sp>
       <p:sp>
         <p:nvSpPr>
-          <p:cNvPr id="15" name="Rounded Rectangle 14"/>
-          <p:cNvSpPr/>
-          <p:nvPr/>
-        </p:nvSpPr>
-        <p:spPr>
-          <a:xfrm>
-            <a:off x="6263640" y="1417320"/>
-            <a:ext cx="5212080" cy="594360"/>
-          </a:xfrm>
-          <a:prstGeom prst="roundRect">
-            <a:avLst/>
-          </a:prstGeom>
-          <a:solidFill>
-            <a:srgbClr val="F0F7FC"/>
-          </a:solidFill>
-          <a:ln>
-            <a:solidFill>
-              <a:srgbClr val="50AA6E"/>
-            </a:solidFill>
-          </a:ln>
-        </p:spPr>
-        <p:style>
-          <a:lnRef idx="1">
-            <a:schemeClr val="accent1"/>
-          </a:lnRef>
-          <a:fillRef idx="3">
-            <a:schemeClr val="accent1"/>
-          </a:fillRef>
-          <a:effectRef idx="2">
-            <a:schemeClr val="accent1"/>
-          </a:effectRef>
-          <a:fontRef idx="minor">
-            <a:schemeClr val="lt1"/>
-          </a:fontRef>
-        </p:style>
-        <p:txBody>
-          <a:bodyPr rtlCol="0" anchor="ctr"/>
-          <a:lstStyle/>
-          <a:p>
-            <a:pPr algn="ctr"/>
-            <a:endParaRPr/>
-          </a:p>
-        </p:txBody>
-      </p:sp>
-      <p:sp>
-        <p:nvSpPr>
-          <p:cNvPr id="16" name="TextBox 15"/>
+          <p:cNvPr id="22" name="TextBox 21"/>
           <p:cNvSpPr txBox="1"/>
           <p:nvPr/>
         </p:nvSpPr>
         <p:spPr>
           <a:xfrm>
-            <a:off x="6400800" y="1508760"/>
-            <a:ext cx="4937760" cy="411480"/>
+            <a:off x="594360" y="6565392"/>
+            <a:ext cx="10972800" cy="182880"/>
           </a:xfrm>
           <a:prstGeom prst="rect">
             <a:avLst/>
@@ -5938,250 +6111,6 @@
           </a:bodyPr>
           <a:lstStyle/>
           <a:p>
-            <a:pPr algn="ctr">
-              <a:defRPr sz="1900" b="1">
-                <a:solidFill>
-                  <a:srgbClr val="193755"/>
-                </a:solidFill>
-              </a:defRPr>
-            </a:pPr>
-            <a:r>
-              <a:t>VARIABLES CIBLES</a:t>
-            </a:r>
-          </a:p>
-        </p:txBody>
-      </p:sp>
-      <p:sp>
-        <p:nvSpPr>
-          <p:cNvPr id="17" name="Rounded Rectangle 16"/>
-          <p:cNvSpPr/>
-          <p:nvPr/>
-        </p:nvSpPr>
-        <p:spPr>
-          <a:xfrm>
-            <a:off x="6537960" y="2331720"/>
-            <a:ext cx="4663440" cy="685800"/>
-          </a:xfrm>
-          <a:prstGeom prst="roundRect">
-            <a:avLst/>
-          </a:prstGeom>
-          <a:solidFill>
-            <a:srgbClr val="F0F7FC"/>
-          </a:solidFill>
-          <a:ln>
-            <a:solidFill>
-              <a:srgbClr val="50AA6E"/>
-            </a:solidFill>
-          </a:ln>
-        </p:spPr>
-        <p:style>
-          <a:lnRef idx="1">
-            <a:schemeClr val="accent1"/>
-          </a:lnRef>
-          <a:fillRef idx="3">
-            <a:schemeClr val="accent1"/>
-          </a:fillRef>
-          <a:effectRef idx="2">
-            <a:schemeClr val="accent1"/>
-          </a:effectRef>
-          <a:fontRef idx="minor">
-            <a:schemeClr val="lt1"/>
-          </a:fontRef>
-        </p:style>
-        <p:txBody>
-          <a:bodyPr rtlCol="0" anchor="ctr"/>
-          <a:lstStyle/>
-          <a:p>
-            <a:pPr algn="ctr"/>
-            <a:endParaRPr/>
-          </a:p>
-        </p:txBody>
-      </p:sp>
-      <p:sp>
-        <p:nvSpPr>
-          <p:cNvPr id="18" name="TextBox 17"/>
-          <p:cNvSpPr txBox="1"/>
-          <p:nvPr/>
-        </p:nvSpPr>
-        <p:spPr>
-          <a:xfrm>
-            <a:off x="6675120" y="2423160"/>
-            <a:ext cx="4389120" cy="502920"/>
-          </a:xfrm>
-          <a:prstGeom prst="rect">
-            <a:avLst/>
-          </a:prstGeom>
-          <a:noFill/>
-        </p:spPr>
-        <p:txBody>
-          <a:bodyPr wrap="none">
-            <a:spAutoFit/>
-          </a:bodyPr>
-          <a:lstStyle/>
-          <a:p>
-            <a:pPr algn="ctr">
-              <a:defRPr sz="1900" b="1">
-                <a:solidFill>
-                  <a:srgbClr val="193755"/>
-                </a:solidFill>
-              </a:defRPr>
-            </a:pPr>
-            <a:r>
-              <a:t>ARR_DEL15</a:t>
-            </a:r>
-          </a:p>
-        </p:txBody>
-      </p:sp>
-      <p:sp>
-        <p:nvSpPr>
-          <p:cNvPr id="19" name="Rounded Rectangle 18"/>
-          <p:cNvSpPr/>
-          <p:nvPr/>
-        </p:nvSpPr>
-        <p:spPr>
-          <a:xfrm>
-            <a:off x="6537960" y="3246120"/>
-            <a:ext cx="4663440" cy="685800"/>
-          </a:xfrm>
-          <a:prstGeom prst="roundRect">
-            <a:avLst/>
-          </a:prstGeom>
-          <a:solidFill>
-            <a:srgbClr val="F0F7FC"/>
-          </a:solidFill>
-          <a:ln>
-            <a:solidFill>
-              <a:srgbClr val="50AA6E"/>
-            </a:solidFill>
-          </a:ln>
-        </p:spPr>
-        <p:style>
-          <a:lnRef idx="1">
-            <a:schemeClr val="accent1"/>
-          </a:lnRef>
-          <a:fillRef idx="3">
-            <a:schemeClr val="accent1"/>
-          </a:fillRef>
-          <a:effectRef idx="2">
-            <a:schemeClr val="accent1"/>
-          </a:effectRef>
-          <a:fontRef idx="minor">
-            <a:schemeClr val="lt1"/>
-          </a:fontRef>
-        </p:style>
-        <p:txBody>
-          <a:bodyPr rtlCol="0" anchor="ctr"/>
-          <a:lstStyle/>
-          <a:p>
-            <a:pPr algn="ctr"/>
-            <a:endParaRPr/>
-          </a:p>
-        </p:txBody>
-      </p:sp>
-      <p:sp>
-        <p:nvSpPr>
-          <p:cNvPr id="20" name="TextBox 19"/>
-          <p:cNvSpPr txBox="1"/>
-          <p:nvPr/>
-        </p:nvSpPr>
-        <p:spPr>
-          <a:xfrm>
-            <a:off x="6675120" y="3337560"/>
-            <a:ext cx="4389120" cy="502920"/>
-          </a:xfrm>
-          <a:prstGeom prst="rect">
-            <a:avLst/>
-          </a:prstGeom>
-          <a:noFill/>
-        </p:spPr>
-        <p:txBody>
-          <a:bodyPr wrap="none">
-            <a:spAutoFit/>
-          </a:bodyPr>
-          <a:lstStyle/>
-          <a:p>
-            <a:pPr algn="ctr">
-              <a:defRPr sz="1900" b="1">
-                <a:solidFill>
-                  <a:srgbClr val="193755"/>
-                </a:solidFill>
-              </a:defRPr>
-            </a:pPr>
-            <a:r>
-              <a:t>ARR_DELAY_NEW</a:t>
-            </a:r>
-          </a:p>
-        </p:txBody>
-      </p:sp>
-      <p:sp>
-        <p:nvSpPr>
-          <p:cNvPr id="21" name="TextBox 20"/>
-          <p:cNvSpPr txBox="1"/>
-          <p:nvPr/>
-        </p:nvSpPr>
-        <p:spPr>
-          <a:xfrm>
-            <a:off x="6537960" y="4343400"/>
-            <a:ext cx="4663440" cy="1005840"/>
-          </a:xfrm>
-          <a:prstGeom prst="rect">
-            <a:avLst/>
-          </a:prstGeom>
-          <a:noFill/>
-        </p:spPr>
-        <p:txBody>
-          <a:bodyPr wrap="none">
-            <a:spAutoFit/>
-          </a:bodyPr>
-          <a:lstStyle/>
-          <a:p>
-            <a:pPr>
-              <a:defRPr sz="1800" b="1">
-                <a:solidFill>
-                  <a:srgbClr val="193755"/>
-                </a:solidFill>
-              </a:defRPr>
-            </a:pPr>
-            <a:r>
-              <a:t>Classification  →  OUI / NON</a:t>
-            </a:r>
-          </a:p>
-          <a:p>
-            <a:pPr>
-              <a:defRPr sz="1800" b="1">
-                <a:solidFill>
-                  <a:srgbClr val="193755"/>
-                </a:solidFill>
-              </a:defRPr>
-            </a:pPr>
-            <a:r>
-              <a:t>Régression  →  MINUTES</a:t>
-            </a:r>
-          </a:p>
-        </p:txBody>
-      </p:sp>
-      <p:sp>
-        <p:nvSpPr>
-          <p:cNvPr id="22" name="TextBox 21"/>
-          <p:cNvSpPr txBox="1"/>
-          <p:nvPr/>
-        </p:nvSpPr>
-        <p:spPr>
-          <a:xfrm>
-            <a:off x="594360" y="6565392"/>
-            <a:ext cx="10972800" cy="182880"/>
-          </a:xfrm>
-          <a:prstGeom prst="rect">
-            <a:avLst/>
-          </a:prstGeom>
-          <a:noFill/>
-        </p:spPr>
-        <p:txBody>
-          <a:bodyPr wrap="none">
-            <a:spAutoFit/>
-          </a:bodyPr>
-          <a:lstStyle/>
-          <a:p>
             <a:pPr>
               <a:defRPr sz="800">
                 <a:solidFill>
@@ -6195,6 +6124,36 @@
           </a:p>
         </p:txBody>
       </p:sp>
+      <p:pic>
+        <p:nvPicPr>
+          <p:cNvPr id="24" name="Image 23">
+            <a:extLst>
+              <a:ext uri="{FF2B5EF4-FFF2-40B4-BE49-F238E27FC236}">
+                <a16:creationId xmlns:a16="http://schemas.microsoft.com/office/drawing/2014/main" id="{DC3AB369-9CE4-42C7-62CE-AF0F44415EC3}"/>
+              </a:ext>
+            </a:extLst>
+          </p:cNvPr>
+          <p:cNvPicPr>
+            <a:picLocks noChangeAspect="1"/>
+          </p:cNvPicPr>
+          <p:nvPr/>
+        </p:nvPicPr>
+        <p:blipFill>
+          <a:blip r:embed="rId2"/>
+          <a:stretch>
+            <a:fillRect/>
+          </a:stretch>
+        </p:blipFill>
+        <p:spPr>
+          <a:xfrm>
+            <a:off x="6529949" y="1650690"/>
+            <a:ext cx="5319358" cy="3058470"/>
+          </a:xfrm>
+          <a:prstGeom prst="rect">
+            <a:avLst/>
+          </a:prstGeom>
+        </p:spPr>
+      </p:pic>
     </p:spTree>
   </p:cSld>
   <p:clrMapOvr>
@@ -6204,6 +6163,596 @@
 </file>
 
 <file path=ppt/slides/slide6.xml><?xml version="1.0" encoding="utf-8"?>
+<p:sld xmlns:a="http://schemas.openxmlformats.org/drawingml/2006/main" xmlns:r="http://schemas.openxmlformats.org/officeDocument/2006/relationships" xmlns:p="http://schemas.openxmlformats.org/presentationml/2006/main">
+  <p:cSld>
+    <p:spTree>
+      <p:nvGrpSpPr>
+        <p:cNvPr id="1" name=""/>
+        <p:cNvGrpSpPr/>
+        <p:nvPr/>
+      </p:nvGrpSpPr>
+      <p:grpSpPr>
+        <a:xfrm>
+          <a:off x="0" y="0"/>
+          <a:ext cx="0" cy="0"/>
+          <a:chOff x="0" y="0"/>
+          <a:chExt cx="0" cy="0"/>
+        </a:xfrm>
+      </p:grpSpPr>
+      <p:sp>
+        <p:nvSpPr>
+          <p:cNvPr id="2" name="TextBox 1"/>
+          <p:cNvSpPr txBox="1"/>
+          <p:nvPr/>
+        </p:nvSpPr>
+        <p:spPr>
+          <a:xfrm>
+            <a:off x="594360" y="320040"/>
+            <a:ext cx="10972800" cy="594360"/>
+          </a:xfrm>
+          <a:prstGeom prst="rect">
+            <a:avLst/>
+          </a:prstGeom>
+          <a:noFill/>
+        </p:spPr>
+        <p:txBody>
+          <a:bodyPr wrap="square" lIns="73152" tIns="18288" rIns="73152" bIns="18288" anchor="ctr">
+            <a:spAutoFit/>
+          </a:bodyPr>
+          <a:lstStyle/>
+          <a:p>
+            <a:pPr algn="l">
+              <a:spcAft>
+                <a:spcPts val="0"/>
+              </a:spcAft>
+            </a:pPr>
+            <a:r>
+              <a:rPr sz="2600" b="1">
+                <a:solidFill>
+                  <a:srgbClr val="1D3B58"/>
+                </a:solidFill>
+                <a:latin typeface="Aptos"/>
+              </a:rPr>
+              <a:t>05 • CIBLES &amp; VARIABLES À SURVEILLER</a:t>
+            </a:r>
+          </a:p>
+        </p:txBody>
+      </p:sp>
+      <p:sp>
+        <p:nvSpPr>
+          <p:cNvPr id="3" name="Rounded Rectangle 2"/>
+          <p:cNvSpPr/>
+          <p:nvPr/>
+        </p:nvSpPr>
+        <p:spPr>
+          <a:xfrm>
+            <a:off x="685800" y="1115568"/>
+            <a:ext cx="3657600" cy="438912"/>
+          </a:xfrm>
+          <a:prstGeom prst="roundRect">
+            <a:avLst/>
+          </a:prstGeom>
+          <a:solidFill>
+            <a:srgbClr val="EFF6FC"/>
+          </a:solidFill>
+          <a:ln w="15240">
+            <a:solidFill>
+              <a:srgbClr val="5B97CB"/>
+            </a:solidFill>
+          </a:ln>
+        </p:spPr>
+        <p:style>
+          <a:lnRef idx="1">
+            <a:schemeClr val="accent1"/>
+          </a:lnRef>
+          <a:fillRef idx="3">
+            <a:schemeClr val="accent1"/>
+          </a:fillRef>
+          <a:effectRef idx="2">
+            <a:schemeClr val="accent1"/>
+          </a:effectRef>
+          <a:fontRef idx="minor">
+            <a:schemeClr val="lt1"/>
+          </a:fontRef>
+        </p:style>
+        <p:txBody>
+          <a:bodyPr rtlCol="0" anchor="ctr"/>
+          <a:lstStyle/>
+          <a:p>
+            <a:pPr algn="ctr"/>
+            <a:endParaRPr/>
+          </a:p>
+        </p:txBody>
+      </p:sp>
+      <p:sp>
+        <p:nvSpPr>
+          <p:cNvPr id="4" name="TextBox 3"/>
+          <p:cNvSpPr txBox="1"/>
+          <p:nvPr/>
+        </p:nvSpPr>
+        <p:spPr>
+          <a:xfrm>
+            <a:off x="804672" y="1124712"/>
+            <a:ext cx="3429000" cy="411480"/>
+          </a:xfrm>
+          <a:prstGeom prst="rect">
+            <a:avLst/>
+          </a:prstGeom>
+          <a:noFill/>
+        </p:spPr>
+        <p:txBody>
+          <a:bodyPr wrap="square" lIns="73152" tIns="18288" rIns="73152" bIns="18288" anchor="ctr">
+            <a:spAutoFit/>
+          </a:bodyPr>
+          <a:lstStyle/>
+          <a:p>
+            <a:pPr algn="ctr">
+              <a:spcAft>
+                <a:spcPts val="0"/>
+              </a:spcAft>
+            </a:pPr>
+            <a:r>
+              <a:rPr sz="1500" b="1">
+                <a:solidFill>
+                  <a:srgbClr val="1D3B58"/>
+                </a:solidFill>
+                <a:latin typeface="Aptos"/>
+              </a:rPr>
+              <a:t>VARIABLES CIBLES</a:t>
+            </a:r>
+          </a:p>
+        </p:txBody>
+      </p:sp>
+      <p:sp>
+        <p:nvSpPr>
+          <p:cNvPr id="5" name="Rounded Rectangle 4"/>
+          <p:cNvSpPr/>
+          <p:nvPr/>
+        </p:nvSpPr>
+        <p:spPr>
+          <a:xfrm>
+            <a:off x="4553712" y="1115568"/>
+            <a:ext cx="6949440" cy="438912"/>
+          </a:xfrm>
+          <a:prstGeom prst="roundRect">
+            <a:avLst/>
+          </a:prstGeom>
+          <a:solidFill>
+            <a:srgbClr val="F1F8F4"/>
+          </a:solidFill>
+          <a:ln w="15240">
+            <a:solidFill>
+              <a:srgbClr val="6FAA8B"/>
+            </a:solidFill>
+          </a:ln>
+        </p:spPr>
+        <p:style>
+          <a:lnRef idx="1">
+            <a:schemeClr val="accent1"/>
+          </a:lnRef>
+          <a:fillRef idx="3">
+            <a:schemeClr val="accent1"/>
+          </a:fillRef>
+          <a:effectRef idx="2">
+            <a:schemeClr val="accent1"/>
+          </a:effectRef>
+          <a:fontRef idx="minor">
+            <a:schemeClr val="lt1"/>
+          </a:fontRef>
+        </p:style>
+        <p:txBody>
+          <a:bodyPr rtlCol="0" anchor="ctr"/>
+          <a:lstStyle/>
+          <a:p>
+            <a:pPr algn="ctr"/>
+            <a:endParaRPr/>
+          </a:p>
+        </p:txBody>
+      </p:sp>
+      <p:sp>
+        <p:nvSpPr>
+          <p:cNvPr id="6" name="TextBox 5"/>
+          <p:cNvSpPr txBox="1"/>
+          <p:nvPr/>
+        </p:nvSpPr>
+        <p:spPr>
+          <a:xfrm>
+            <a:off x="4681728" y="1124712"/>
+            <a:ext cx="6675120" cy="411480"/>
+          </a:xfrm>
+          <a:prstGeom prst="rect">
+            <a:avLst/>
+          </a:prstGeom>
+          <a:noFill/>
+        </p:spPr>
+        <p:txBody>
+          <a:bodyPr wrap="square" lIns="73152" tIns="18288" rIns="73152" bIns="18288" anchor="ctr">
+            <a:spAutoFit/>
+          </a:bodyPr>
+          <a:lstStyle/>
+          <a:p>
+            <a:pPr algn="ctr">
+              <a:spcAft>
+                <a:spcPts val="0"/>
+              </a:spcAft>
+            </a:pPr>
+            <a:r>
+              <a:rPr sz="1500" b="1">
+                <a:solidFill>
+                  <a:srgbClr val="1D3B58"/>
+                </a:solidFill>
+                <a:latin typeface="Aptos"/>
+              </a:rPr>
+              <a:t>VARIABLES POTENTIELLEMENT PROBLÉMATIQUES</a:t>
+            </a:r>
+          </a:p>
+        </p:txBody>
+      </p:sp>
+      <p:sp>
+        <p:nvSpPr>
+          <p:cNvPr id="7" name="Rounded Rectangle 6"/>
+          <p:cNvSpPr/>
+          <p:nvPr/>
+        </p:nvSpPr>
+        <p:spPr>
+          <a:xfrm>
+            <a:off x="749808" y="1783080"/>
+            <a:ext cx="3520440" cy="1417320"/>
+          </a:xfrm>
+          <a:prstGeom prst="roundRect">
+            <a:avLst/>
+          </a:prstGeom>
+          <a:solidFill>
+            <a:srgbClr val="EFF6FC"/>
+          </a:solidFill>
+          <a:ln w="15240">
+            <a:solidFill>
+              <a:srgbClr val="5B97CB"/>
+            </a:solidFill>
+          </a:ln>
+        </p:spPr>
+        <p:style>
+          <a:lnRef idx="1">
+            <a:schemeClr val="accent1"/>
+          </a:lnRef>
+          <a:fillRef idx="3">
+            <a:schemeClr val="accent1"/>
+          </a:fillRef>
+          <a:effectRef idx="2">
+            <a:schemeClr val="accent1"/>
+          </a:effectRef>
+          <a:fontRef idx="minor">
+            <a:schemeClr val="lt1"/>
+          </a:fontRef>
+        </p:style>
+        <p:txBody>
+          <a:bodyPr rtlCol="0" anchor="ctr"/>
+          <a:lstStyle/>
+          <a:p>
+            <a:pPr algn="ctr"/>
+            <a:endParaRPr/>
+          </a:p>
+        </p:txBody>
+      </p:sp>
+      <p:sp>
+        <p:nvSpPr>
+          <p:cNvPr id="8" name="TextBox 7"/>
+          <p:cNvSpPr txBox="1"/>
+          <p:nvPr/>
+        </p:nvSpPr>
+        <p:spPr>
+          <a:xfrm>
+            <a:off x="932688" y="1901952"/>
+            <a:ext cx="3154680" cy="347472"/>
+          </a:xfrm>
+          <a:prstGeom prst="rect">
+            <a:avLst/>
+          </a:prstGeom>
+          <a:noFill/>
+        </p:spPr>
+        <p:txBody>
+          <a:bodyPr wrap="square" lIns="73152" tIns="18288" rIns="73152" bIns="18288" anchor="ctr">
+            <a:spAutoFit/>
+          </a:bodyPr>
+          <a:lstStyle/>
+          <a:p>
+            <a:pPr algn="ctr">
+              <a:spcAft>
+                <a:spcPts val="0"/>
+              </a:spcAft>
+            </a:pPr>
+            <a:r>
+              <a:rPr sz="2000" b="1">
+                <a:solidFill>
+                  <a:srgbClr val="1D3B58"/>
+                </a:solidFill>
+                <a:latin typeface="Aptos"/>
+              </a:rPr>
+              <a:t>ArrDel15</a:t>
+            </a:r>
+          </a:p>
+        </p:txBody>
+      </p:sp>
+      <p:sp>
+        <p:nvSpPr>
+          <p:cNvPr id="9" name="TextBox 8"/>
+          <p:cNvSpPr txBox="1"/>
+          <p:nvPr/>
+        </p:nvSpPr>
+        <p:spPr>
+          <a:xfrm>
+            <a:off x="987552" y="2267712"/>
+            <a:ext cx="3063240" cy="685800"/>
+          </a:xfrm>
+          <a:prstGeom prst="rect">
+            <a:avLst/>
+          </a:prstGeom>
+          <a:noFill/>
+        </p:spPr>
+        <p:txBody>
+          <a:bodyPr wrap="square" lIns="73152" tIns="18288" rIns="73152" bIns="18288" anchor="ctr">
+            <a:spAutoFit/>
+          </a:bodyPr>
+          <a:lstStyle/>
+          <a:p>
+            <a:pPr algn="ctr">
+              <a:spcAft>
+                <a:spcPts val="0"/>
+              </a:spcAft>
+            </a:pPr>
+            <a:r>
+              <a:rPr sz="1300" b="0">
+                <a:solidFill>
+                  <a:srgbClr val="2F3943"/>
+                </a:solidFill>
+                <a:latin typeface="Aptos"/>
+              </a:rPr>
+              <a:t>Classification • 1 = arrivée avec ≥ 15 min de retard; 0 = sinon.</a:t>
+            </a:r>
+          </a:p>
+        </p:txBody>
+      </p:sp>
+      <p:sp>
+        <p:nvSpPr>
+          <p:cNvPr id="10" name="Rounded Rectangle 9"/>
+          <p:cNvSpPr/>
+          <p:nvPr/>
+        </p:nvSpPr>
+        <p:spPr>
+          <a:xfrm>
+            <a:off x="749808" y="3401568"/>
+            <a:ext cx="3520440" cy="1417320"/>
+          </a:xfrm>
+          <a:prstGeom prst="roundRect">
+            <a:avLst/>
+          </a:prstGeom>
+          <a:solidFill>
+            <a:srgbClr val="F1F8F4"/>
+          </a:solidFill>
+          <a:ln w="15240">
+            <a:solidFill>
+              <a:srgbClr val="6FAA8B"/>
+            </a:solidFill>
+          </a:ln>
+        </p:spPr>
+        <p:style>
+          <a:lnRef idx="1">
+            <a:schemeClr val="accent1"/>
+          </a:lnRef>
+          <a:fillRef idx="3">
+            <a:schemeClr val="accent1"/>
+          </a:fillRef>
+          <a:effectRef idx="2">
+            <a:schemeClr val="accent1"/>
+          </a:effectRef>
+          <a:fontRef idx="minor">
+            <a:schemeClr val="lt1"/>
+          </a:fontRef>
+        </p:style>
+        <p:txBody>
+          <a:bodyPr rtlCol="0" anchor="ctr"/>
+          <a:lstStyle/>
+          <a:p>
+            <a:pPr algn="ctr"/>
+            <a:endParaRPr/>
+          </a:p>
+        </p:txBody>
+      </p:sp>
+      <p:sp>
+        <p:nvSpPr>
+          <p:cNvPr id="11" name="TextBox 10"/>
+          <p:cNvSpPr txBox="1"/>
+          <p:nvPr/>
+        </p:nvSpPr>
+        <p:spPr>
+          <a:xfrm>
+            <a:off x="932688" y="3520440"/>
+            <a:ext cx="3154680" cy="347472"/>
+          </a:xfrm>
+          <a:prstGeom prst="rect">
+            <a:avLst/>
+          </a:prstGeom>
+          <a:noFill/>
+        </p:spPr>
+        <p:txBody>
+          <a:bodyPr wrap="square" lIns="73152" tIns="18288" rIns="73152" bIns="18288" anchor="ctr">
+            <a:spAutoFit/>
+          </a:bodyPr>
+          <a:lstStyle/>
+          <a:p>
+            <a:pPr algn="ctr">
+              <a:spcAft>
+                <a:spcPts val="0"/>
+              </a:spcAft>
+            </a:pPr>
+            <a:r>
+              <a:rPr sz="1800" b="1">
+                <a:solidFill>
+                  <a:srgbClr val="1D3B58"/>
+                </a:solidFill>
+                <a:latin typeface="Aptos"/>
+              </a:rPr>
+              <a:t>Arr_Delay_Minutes</a:t>
+            </a:r>
+          </a:p>
+        </p:txBody>
+      </p:sp>
+      <p:sp>
+        <p:nvSpPr>
+          <p:cNvPr id="12" name="TextBox 11"/>
+          <p:cNvSpPr txBox="1"/>
+          <p:nvPr/>
+        </p:nvSpPr>
+        <p:spPr>
+          <a:xfrm>
+            <a:off x="987552" y="3886200"/>
+            <a:ext cx="3063240" cy="685800"/>
+          </a:xfrm>
+          <a:prstGeom prst="rect">
+            <a:avLst/>
+          </a:prstGeom>
+          <a:noFill/>
+        </p:spPr>
+        <p:txBody>
+          <a:bodyPr wrap="square" lIns="73152" tIns="18288" rIns="73152" bIns="18288" anchor="ctr">
+            <a:spAutoFit/>
+          </a:bodyPr>
+          <a:lstStyle/>
+          <a:p>
+            <a:pPr algn="ctr">
+              <a:spcAft>
+                <a:spcPts val="0"/>
+              </a:spcAft>
+            </a:pPr>
+            <a:r>
+              <a:rPr sz="1300" b="0">
+                <a:solidFill>
+                  <a:srgbClr val="2F3943"/>
+                </a:solidFill>
+                <a:latin typeface="Aptos"/>
+              </a:rPr>
+              <a:t>Régression • nombre de minutes de retard à l’arrivée.</a:t>
+            </a:r>
+          </a:p>
+        </p:txBody>
+      </p:sp>
+      <p:sp>
+        <p:nvSpPr>
+          <p:cNvPr id="13" name="TextBox 12"/>
+          <p:cNvSpPr txBox="1"/>
+          <p:nvPr/>
+        </p:nvSpPr>
+        <p:spPr>
+          <a:xfrm>
+            <a:off x="841248" y="5074920"/>
+            <a:ext cx="3337560" cy="713232"/>
+          </a:xfrm>
+          <a:prstGeom prst="rect">
+            <a:avLst/>
+          </a:prstGeom>
+          <a:noFill/>
+        </p:spPr>
+        <p:txBody>
+          <a:bodyPr wrap="square" lIns="73152" tIns="18288" rIns="73152" bIns="18288" anchor="ctr">
+            <a:spAutoFit/>
+          </a:bodyPr>
+          <a:lstStyle/>
+          <a:p>
+            <a:pPr algn="ctr">
+              <a:spcAft>
+                <a:spcPts val="0"/>
+              </a:spcAft>
+            </a:pPr>
+            <a:r>
+              <a:rPr sz="1200" b="0">
+                <a:solidFill>
+                  <a:srgbClr val="687785"/>
+                </a:solidFill>
+                <a:latin typeface="Aptos"/>
+              </a:rPr>
+              <a:t>À retenir : les cibles servent à entraîner et évaluer les modèles; elles ne doivent pas être des entrées.</a:t>
+            </a:r>
+          </a:p>
+        </p:txBody>
+      </p:sp>
+      <p:sp>
+        <p:nvSpPr>
+          <p:cNvPr id="29" name="TextBox 28"/>
+          <p:cNvSpPr txBox="1"/>
+          <p:nvPr/>
+        </p:nvSpPr>
+        <p:spPr>
+          <a:xfrm>
+            <a:off x="594360" y="6547104"/>
+            <a:ext cx="10972800" cy="182880"/>
+          </a:xfrm>
+          <a:prstGeom prst="rect">
+            <a:avLst/>
+          </a:prstGeom>
+          <a:noFill/>
+        </p:spPr>
+        <p:txBody>
+          <a:bodyPr wrap="square" lIns="73152" tIns="18288" rIns="73152" bIns="18288" anchor="ctr">
+            <a:spAutoFit/>
+          </a:bodyPr>
+          <a:lstStyle/>
+          <a:p>
+            <a:pPr algn="l">
+              <a:spcAft>
+                <a:spcPts val="0"/>
+              </a:spcAft>
+            </a:pPr>
+            <a:r>
+              <a:rPr sz="800" b="0">
+                <a:solidFill>
+                  <a:srgbClr val="687785"/>
+                </a:solidFill>
+                <a:latin typeface="Aptos"/>
+              </a:rPr>
+              <a:t>VOLARUS • PROJET IA • ÉQUIPE 14                                      6</a:t>
+            </a:r>
+          </a:p>
+        </p:txBody>
+      </p:sp>
+      <p:pic>
+        <p:nvPicPr>
+          <p:cNvPr id="31" name="Image 30">
+            <a:extLst>
+              <a:ext uri="{FF2B5EF4-FFF2-40B4-BE49-F238E27FC236}">
+                <a16:creationId xmlns:a16="http://schemas.microsoft.com/office/drawing/2014/main" id="{834FF45B-2E47-ACA2-1724-27A8CA68B566}"/>
+              </a:ext>
+            </a:extLst>
+          </p:cNvPr>
+          <p:cNvPicPr>
+            <a:picLocks noChangeAspect="1"/>
+          </p:cNvPicPr>
+          <p:nvPr/>
+        </p:nvPicPr>
+        <p:blipFill>
+          <a:blip r:embed="rId2"/>
+          <a:stretch>
+            <a:fillRect/>
+          </a:stretch>
+        </p:blipFill>
+        <p:spPr>
+          <a:xfrm>
+            <a:off x="5240656" y="1736822"/>
+            <a:ext cx="5963792" cy="3429000"/>
+          </a:xfrm>
+          <a:prstGeom prst="rect">
+            <a:avLst/>
+          </a:prstGeom>
+        </p:spPr>
+      </p:pic>
+    </p:spTree>
+  </p:cSld>
+  <p:clrMapOvr>
+    <a:masterClrMapping/>
+  </p:clrMapOvr>
+</p:sld>
+</file>
+
+<file path=ppt/slides/slide7.xml><?xml version="1.0" encoding="utf-8"?>
 <p:sld xmlns:a="http://schemas.openxmlformats.org/drawingml/2006/main" xmlns:r="http://schemas.openxmlformats.org/officeDocument/2006/relationships" xmlns:p="http://schemas.openxmlformats.org/presentationml/2006/main">
   <p:cSld>
     <p:bg>
@@ -6352,8 +6901,8 @@
         </p:nvSpPr>
         <p:spPr>
           <a:xfrm>
-            <a:off x="1181600" y="2240280"/>
-            <a:ext cx="2391681" cy="323165"/>
+            <a:off x="1097379" y="2240280"/>
+            <a:ext cx="2560124" cy="323165"/>
           </a:xfrm>
           <a:prstGeom prst="rect">
             <a:avLst/>
@@ -6375,19 +6924,7 @@
             </a:pPr>
             <a:r>
               <a:rPr lang="fr-CA" dirty="0"/>
-              <a:t>Aucune v</a:t>
-            </a:r>
-            <a:r>
-              <a:rPr dirty="0" err="1"/>
-              <a:t>aleurs</a:t>
-            </a:r>
-            <a:r>
-              <a:rPr dirty="0"/>
-              <a:t> </a:t>
-            </a:r>
-            <a:r>
-              <a:rPr dirty="0" err="1"/>
-              <a:t>manquantes</a:t>
+              <a:t>Quelques Valeurs manquantes</a:t>
             </a:r>
             <a:endParaRPr dirty="0"/>
           </a:p>
@@ -6608,8 +7145,8 @@
         </p:nvSpPr>
         <p:spPr>
           <a:xfrm>
-            <a:off x="8113273" y="2240280"/>
-            <a:ext cx="3341619" cy="323165"/>
+            <a:off x="8334486" y="2240280"/>
+            <a:ext cx="2899192" cy="323165"/>
           </a:xfrm>
           <a:prstGeom prst="rect">
             <a:avLst/>
@@ -6635,7 +7172,11 @@
             </a:r>
             <a:r>
               <a:rPr dirty="0"/>
-              <a:t> possible</a:t>
+              <a:t> </a:t>
+            </a:r>
+            <a:r>
+              <a:rPr lang="en-US" dirty="0"/>
+              <a:t>de</a:t>
             </a:r>
             <a:r>
               <a:rPr lang="fr-CA" dirty="0"/>
@@ -6734,8 +7275,8 @@
         </p:nvSpPr>
         <p:spPr>
           <a:xfrm>
-            <a:off x="822959" y="4526280"/>
-            <a:ext cx="3108960" cy="594360"/>
+            <a:off x="2037443" y="4526280"/>
+            <a:ext cx="679994" cy="323165"/>
           </a:xfrm>
           <a:prstGeom prst="rect">
             <a:avLst/>
@@ -6756,8 +7297,10 @@
               </a:defRPr>
             </a:pPr>
             <a:r>
-              <a:t>À vérifier</a:t>
-            </a:r>
+              <a:rPr lang="en-US" dirty="0" err="1"/>
+              <a:t>Aucun</a:t>
+            </a:r>
+            <a:endParaRPr dirty="0"/>
           </a:p>
         </p:txBody>
       </p:sp>
@@ -6850,8 +7393,8 @@
         </p:nvSpPr>
         <p:spPr>
           <a:xfrm>
-            <a:off x="4526280" y="4526280"/>
-            <a:ext cx="3108960" cy="594360"/>
+            <a:off x="5549238" y="4526280"/>
+            <a:ext cx="1063048" cy="323165"/>
           </a:xfrm>
           <a:prstGeom prst="rect">
             <a:avLst/>
@@ -6872,8 +7415,14 @@
               </a:defRPr>
             </a:pPr>
             <a:r>
-              <a:t>Valeurs aberrantes</a:t>
-            </a:r>
+              <a:rPr lang="en-US" dirty="0"/>
+              <a:t>Non </a:t>
+            </a:r>
+            <a:r>
+              <a:rPr lang="en-US" dirty="0" err="1"/>
+              <a:t>définit</a:t>
+            </a:r>
+            <a:endParaRPr dirty="0"/>
           </a:p>
         </p:txBody>
       </p:sp>
@@ -6988,8 +7537,14 @@
               </a:defRPr>
             </a:pPr>
             <a:r>
-              <a:t>À surveiller</a:t>
-            </a:r>
+              <a:rPr dirty="0"/>
+              <a:t>À </a:t>
+            </a:r>
+            <a:r>
+              <a:rPr dirty="0" err="1"/>
+              <a:t>surveiller</a:t>
+            </a:r>
+            <a:endParaRPr dirty="0"/>
           </a:p>
         </p:txBody>
       </p:sp>
@@ -7036,7 +7591,7 @@
 </p:sld>
 </file>
 
-<file path=ppt/slides/slide7.xml><?xml version="1.0" encoding="utf-8"?>
+<file path=ppt/slides/slide8.xml><?xml version="1.0" encoding="utf-8"?>
 <p:sld xmlns:a="http://schemas.openxmlformats.org/drawingml/2006/main" xmlns:r="http://schemas.openxmlformats.org/officeDocument/2006/relationships" xmlns:p="http://schemas.openxmlformats.org/presentationml/2006/main">
   <p:cSld>
     <p:bg>
@@ -7420,8 +7975,8 @@
         </p:nvSpPr>
         <p:spPr>
           <a:xfrm>
-            <a:off x="2333390" y="4069080"/>
-            <a:ext cx="7494744" cy="461665"/>
+            <a:off x="2980041" y="4069080"/>
+            <a:ext cx="6201441" cy="461665"/>
           </a:xfrm>
           <a:prstGeom prst="rect">
             <a:avLst/>
@@ -7441,14 +7996,6 @@
                 </a:solidFill>
               </a:defRPr>
             </a:pPr>
-            <a:r>
-              <a:rPr lang="fr-CA" dirty="0"/>
-              <a:t>Analyse </a:t>
-            </a:r>
-            <a:r>
-              <a:rPr lang="en-US" dirty="0"/>
-              <a:t>• </a:t>
-            </a:r>
             <a:r>
               <a:rPr dirty="0" err="1"/>
               <a:t>Nettoyer</a:t>

--- a/PROJET/Presentation_Volarus_Condensee_v3.pptx
+++ b/PROJET/Presentation_Volarus_Condensee_v3.pptx
@@ -133,7 +133,7 @@
 <file path=ppt/revisionInfo.xml><?xml version="1.0" encoding="utf-8"?>
 <p1510:revInfo xmlns:a="http://schemas.openxmlformats.org/drawingml/2006/main" xmlns:r="http://schemas.openxmlformats.org/officeDocument/2006/relationships" xmlns:p1510="http://schemas.microsoft.com/office/powerpoint/2015/10/main">
   <p1510:revLst>
-    <p1510:client id="{B0E2BBC6-32AC-4129-AF59-927F125864FC}" v="5" dt="2026-10-20T14:52:13.176"/>
+    <p1510:client id="{B0E2BBC6-32AC-4129-AF59-927F125864FC}" v="1" dt="2026-10-21T19:47:04.933"/>
   </p1510:revLst>
 </p1510:revInfo>
 </file>
@@ -142,11 +142,26 @@
 <pc:chgInfo xmlns:a="http://schemas.openxmlformats.org/drawingml/2006/main" xmlns:r="http://schemas.openxmlformats.org/officeDocument/2006/relationships" xmlns:ac="http://schemas.microsoft.com/office/drawing/2013/main/command" xmlns:pc="http://schemas.microsoft.com/office/powerpoint/2013/main/command">
   <pc:docChgLst>
     <pc:chgData name="alex seguin" userId="c47c39593cf1707d" providerId="LiveId" clId="{56C82717-B78C-4079-A034-267DC212A18F}"/>
-    <pc:docChg chg="custSel addSld delSld modSld sldOrd">
-      <pc:chgData name="alex seguin" userId="c47c39593cf1707d" providerId="LiveId" clId="{56C82717-B78C-4079-A034-267DC212A18F}" dt="2026-10-21T14:04:53.846" v="385" actId="20577"/>
+    <pc:docChg chg="undo custSel addSld delSld modSld sldOrd">
+      <pc:chgData name="alex seguin" userId="c47c39593cf1707d" providerId="LiveId" clId="{56C82717-B78C-4079-A034-267DC212A18F}" dt="2026-10-21T20:02:19.311" v="416" actId="20577"/>
       <pc:docMkLst>
         <pc:docMk/>
       </pc:docMkLst>
+      <pc:sldChg chg="modSp mod">
+        <pc:chgData name="alex seguin" userId="c47c39593cf1707d" providerId="LiveId" clId="{56C82717-B78C-4079-A034-267DC212A18F}" dt="2026-10-21T20:02:19.311" v="416" actId="20577"/>
+        <pc:sldMkLst>
+          <pc:docMk/>
+          <pc:sldMk cId="0" sldId="257"/>
+        </pc:sldMkLst>
+        <pc:spChg chg="mod">
+          <ac:chgData name="alex seguin" userId="c47c39593cf1707d" providerId="LiveId" clId="{56C82717-B78C-4079-A034-267DC212A18F}" dt="2026-10-21T20:02:19.311" v="416" actId="20577"/>
+          <ac:spMkLst>
+            <pc:docMk/>
+            <pc:sldMk cId="0" sldId="257"/>
+            <ac:spMk id="5" creationId="{00000000-0000-0000-0000-000000000000}"/>
+          </ac:spMkLst>
+        </pc:spChg>
+      </pc:sldChg>
       <pc:sldChg chg="addSp delSp modSp mod">
         <pc:chgData name="alex seguin" userId="c47c39593cf1707d" providerId="LiveId" clId="{56C82717-B78C-4079-A034-267DC212A18F}" dt="2026-10-20T14:58:11.379" v="293" actId="1076"/>
         <pc:sldMkLst>
@@ -297,18 +312,218 @@
           </ac:spMkLst>
         </pc:spChg>
       </pc:sldChg>
-      <pc:sldChg chg="modSp mod">
-        <pc:chgData name="alex seguin" userId="c47c39593cf1707d" providerId="LiveId" clId="{56C82717-B78C-4079-A034-267DC212A18F}" dt="2026-10-21T14:04:53.846" v="385" actId="20577"/>
+      <pc:sldChg chg="addSp delSp modSp mod">
+        <pc:chgData name="alex seguin" userId="c47c39593cf1707d" providerId="LiveId" clId="{56C82717-B78C-4079-A034-267DC212A18F}" dt="2026-10-21T19:58:18.883" v="403" actId="1076"/>
         <pc:sldMkLst>
           <pc:docMk/>
           <pc:sldMk cId="0" sldId="262"/>
         </pc:sldMkLst>
-        <pc:spChg chg="mod">
-          <ac:chgData name="alex seguin" userId="c47c39593cf1707d" providerId="LiveId" clId="{56C82717-B78C-4079-A034-267DC212A18F}" dt="2026-10-21T14:04:53.846" v="385" actId="20577"/>
+        <pc:spChg chg="del">
+          <ac:chgData name="alex seguin" userId="c47c39593cf1707d" providerId="LiveId" clId="{56C82717-B78C-4079-A034-267DC212A18F}" dt="2026-10-21T19:47:34.872" v="390" actId="478"/>
+          <ac:spMkLst>
+            <pc:docMk/>
+            <pc:sldMk cId="0" sldId="262"/>
+            <ac:spMk id="3" creationId="{00000000-0000-0000-0000-000000000000}"/>
+          </ac:spMkLst>
+        </pc:spChg>
+        <pc:spChg chg="del">
+          <ac:chgData name="alex seguin" userId="c47c39593cf1707d" providerId="LiveId" clId="{56C82717-B78C-4079-A034-267DC212A18F}" dt="2026-10-21T19:47:34.872" v="390" actId="478"/>
+          <ac:spMkLst>
+            <pc:docMk/>
+            <pc:sldMk cId="0" sldId="262"/>
+            <ac:spMk id="4" creationId="{00000000-0000-0000-0000-000000000000}"/>
+          </ac:spMkLst>
+        </pc:spChg>
+        <pc:spChg chg="del">
+          <ac:chgData name="alex seguin" userId="c47c39593cf1707d" providerId="LiveId" clId="{56C82717-B78C-4079-A034-267DC212A18F}" dt="2026-10-21T19:47:34.872" v="390" actId="478"/>
+          <ac:spMkLst>
+            <pc:docMk/>
+            <pc:sldMk cId="0" sldId="262"/>
+            <ac:spMk id="5" creationId="{00000000-0000-0000-0000-000000000000}"/>
+          </ac:spMkLst>
+        </pc:spChg>
+        <pc:spChg chg="del">
+          <ac:chgData name="alex seguin" userId="c47c39593cf1707d" providerId="LiveId" clId="{56C82717-B78C-4079-A034-267DC212A18F}" dt="2026-10-21T19:47:34.872" v="390" actId="478"/>
+          <ac:spMkLst>
+            <pc:docMk/>
+            <pc:sldMk cId="0" sldId="262"/>
+            <ac:spMk id="6" creationId="{00000000-0000-0000-0000-000000000000}"/>
+          </ac:spMkLst>
+        </pc:spChg>
+        <pc:spChg chg="del">
+          <ac:chgData name="alex seguin" userId="c47c39593cf1707d" providerId="LiveId" clId="{56C82717-B78C-4079-A034-267DC212A18F}" dt="2026-10-21T19:47:34.872" v="390" actId="478"/>
+          <ac:spMkLst>
+            <pc:docMk/>
+            <pc:sldMk cId="0" sldId="262"/>
+            <ac:spMk id="7" creationId="{00000000-0000-0000-0000-000000000000}"/>
+          </ac:spMkLst>
+        </pc:spChg>
+        <pc:spChg chg="del">
+          <ac:chgData name="alex seguin" userId="c47c39593cf1707d" providerId="LiveId" clId="{56C82717-B78C-4079-A034-267DC212A18F}" dt="2026-10-21T19:47:34.872" v="390" actId="478"/>
+          <ac:spMkLst>
+            <pc:docMk/>
+            <pc:sldMk cId="0" sldId="262"/>
+            <ac:spMk id="8" creationId="{00000000-0000-0000-0000-000000000000}"/>
+          </ac:spMkLst>
+        </pc:spChg>
+        <pc:spChg chg="del">
+          <ac:chgData name="alex seguin" userId="c47c39593cf1707d" providerId="LiveId" clId="{56C82717-B78C-4079-A034-267DC212A18F}" dt="2026-10-21T19:47:34.872" v="390" actId="478"/>
+          <ac:spMkLst>
+            <pc:docMk/>
+            <pc:sldMk cId="0" sldId="262"/>
+            <ac:spMk id="9" creationId="{00000000-0000-0000-0000-000000000000}"/>
+          </ac:spMkLst>
+        </pc:spChg>
+        <pc:spChg chg="del">
+          <ac:chgData name="alex seguin" userId="c47c39593cf1707d" providerId="LiveId" clId="{56C82717-B78C-4079-A034-267DC212A18F}" dt="2026-10-21T19:47:34.872" v="390" actId="478"/>
+          <ac:spMkLst>
+            <pc:docMk/>
+            <pc:sldMk cId="0" sldId="262"/>
+            <ac:spMk id="10" creationId="{00000000-0000-0000-0000-000000000000}"/>
+          </ac:spMkLst>
+        </pc:spChg>
+        <pc:spChg chg="del mod">
+          <ac:chgData name="alex seguin" userId="c47c39593cf1707d" providerId="LiveId" clId="{56C82717-B78C-4079-A034-267DC212A18F}" dt="2026-10-21T19:39:09.643" v="386" actId="478"/>
           <ac:spMkLst>
             <pc:docMk/>
             <pc:sldMk cId="0" sldId="262"/>
             <ac:spMk id="11" creationId="{00000000-0000-0000-0000-000000000000}"/>
+          </ac:spMkLst>
+        </pc:spChg>
+        <pc:spChg chg="add mod">
+          <ac:chgData name="alex seguin" userId="c47c39593cf1707d" providerId="LiveId" clId="{56C82717-B78C-4079-A034-267DC212A18F}" dt="2026-10-21T19:58:18.883" v="403" actId="1076"/>
+          <ac:spMkLst>
+            <pc:docMk/>
+            <pc:sldMk cId="0" sldId="262"/>
+            <ac:spMk id="14" creationId="{A7B1C36E-5A28-DAF5-972B-A689366F1964}"/>
+          </ac:spMkLst>
+        </pc:spChg>
+        <pc:spChg chg="add mod">
+          <ac:chgData name="alex seguin" userId="c47c39593cf1707d" providerId="LiveId" clId="{56C82717-B78C-4079-A034-267DC212A18F}" dt="2026-10-21T19:58:18.883" v="403" actId="1076"/>
+          <ac:spMkLst>
+            <pc:docMk/>
+            <pc:sldMk cId="0" sldId="262"/>
+            <ac:spMk id="16" creationId="{C9B5D37F-0762-C629-EAA8-DA5285A61CDD}"/>
+          </ac:spMkLst>
+        </pc:spChg>
+        <pc:spChg chg="mod">
+          <ac:chgData name="alex seguin" userId="c47c39593cf1707d" providerId="LiveId" clId="{56C82717-B78C-4079-A034-267DC212A18F}" dt="2026-10-21T19:47:58.706" v="397" actId="1076"/>
+          <ac:spMkLst>
+            <pc:docMk/>
+            <pc:sldMk cId="0" sldId="262"/>
+            <ac:spMk id="20" creationId="{A4F86B7F-FFDE-9AA2-0098-3C4CBE636D97}"/>
+          </ac:spMkLst>
+        </pc:spChg>
+        <pc:spChg chg="add mod">
+          <ac:chgData name="alex seguin" userId="c47c39593cf1707d" providerId="LiveId" clId="{56C82717-B78C-4079-A034-267DC212A18F}" dt="2026-10-21T19:58:18.883" v="403" actId="1076"/>
+          <ac:spMkLst>
+            <pc:docMk/>
+            <pc:sldMk cId="0" sldId="262"/>
+            <ac:spMk id="24" creationId="{AE2B48B7-690A-DA1A-57BF-5F33AED832DC}"/>
+          </ac:spMkLst>
+        </pc:spChg>
+        <pc:spChg chg="add mod">
+          <ac:chgData name="alex seguin" userId="c47c39593cf1707d" providerId="LiveId" clId="{56C82717-B78C-4079-A034-267DC212A18F}" dt="2026-10-21T19:58:18.883" v="403" actId="1076"/>
+          <ac:spMkLst>
+            <pc:docMk/>
+            <pc:sldMk cId="0" sldId="262"/>
+            <ac:spMk id="26" creationId="{4DF3A866-B3D2-F35E-98DA-A980052C2893}"/>
+          </ac:spMkLst>
+        </pc:spChg>
+        <pc:spChg chg="add mod">
+          <ac:chgData name="alex seguin" userId="c47c39593cf1707d" providerId="LiveId" clId="{56C82717-B78C-4079-A034-267DC212A18F}" dt="2026-10-21T19:58:18.883" v="403" actId="1076"/>
+          <ac:spMkLst>
+            <pc:docMk/>
+            <pc:sldMk cId="0" sldId="262"/>
+            <ac:spMk id="28" creationId="{03BE9589-7592-94FC-F059-40D5495CE150}"/>
+          </ac:spMkLst>
+        </pc:spChg>
+        <pc:spChg chg="add mod">
+          <ac:chgData name="alex seguin" userId="c47c39593cf1707d" providerId="LiveId" clId="{56C82717-B78C-4079-A034-267DC212A18F}" dt="2026-10-21T19:58:18.883" v="403" actId="1076"/>
+          <ac:spMkLst>
+            <pc:docMk/>
+            <pc:sldMk cId="0" sldId="262"/>
+            <ac:spMk id="30" creationId="{276137B4-FFB0-8540-88BA-599048AFD9F6}"/>
+          </ac:spMkLst>
+        </pc:spChg>
+        <pc:spChg chg="mod">
+          <ac:chgData name="alex seguin" userId="c47c39593cf1707d" providerId="LiveId" clId="{56C82717-B78C-4079-A034-267DC212A18F}" dt="2026-10-21T19:47:51.055" v="394" actId="1076"/>
+          <ac:spMkLst>
+            <pc:docMk/>
+            <pc:sldMk cId="0" sldId="262"/>
+            <ac:spMk id="32" creationId="{04C09199-4554-0BF0-EA11-CFB4A6D8EE86}"/>
+          </ac:spMkLst>
+        </pc:spChg>
+        <pc:spChg chg="mod">
+          <ac:chgData name="alex seguin" userId="c47c39593cf1707d" providerId="LiveId" clId="{56C82717-B78C-4079-A034-267DC212A18F}" dt="2026-10-21T19:47:51.055" v="394" actId="1076"/>
+          <ac:spMkLst>
+            <pc:docMk/>
+            <pc:sldMk cId="0" sldId="262"/>
+            <ac:spMk id="34" creationId="{3267D279-A24C-D93C-C241-792CC4B9ECCD}"/>
+          </ac:spMkLst>
+        </pc:spChg>
+        <pc:spChg chg="mod">
+          <ac:chgData name="alex seguin" userId="c47c39593cf1707d" providerId="LiveId" clId="{56C82717-B78C-4079-A034-267DC212A18F}" dt="2026-10-21T19:47:55.462" v="395" actId="1076"/>
+          <ac:spMkLst>
+            <pc:docMk/>
+            <pc:sldMk cId="0" sldId="262"/>
+            <ac:spMk id="36" creationId="{334C81F5-B1F2-87BB-8857-61750FA9FC66}"/>
+          </ac:spMkLst>
+        </pc:spChg>
+        <pc:spChg chg="mod">
+          <ac:chgData name="alex seguin" userId="c47c39593cf1707d" providerId="LiveId" clId="{56C82717-B78C-4079-A034-267DC212A18F}" dt="2026-10-21T19:47:55.462" v="395" actId="1076"/>
+          <ac:spMkLst>
+            <pc:docMk/>
+            <pc:sldMk cId="0" sldId="262"/>
+            <ac:spMk id="38" creationId="{05073E37-D94D-5EDB-B98C-A51AF4E21BBE}"/>
+          </ac:spMkLst>
+        </pc:spChg>
+        <pc:spChg chg="mod">
+          <ac:chgData name="alex seguin" userId="c47c39593cf1707d" providerId="LiveId" clId="{56C82717-B78C-4079-A034-267DC212A18F}" dt="2026-10-21T19:48:05.819" v="398" actId="1076"/>
+          <ac:spMkLst>
+            <pc:docMk/>
+            <pc:sldMk cId="0" sldId="262"/>
+            <ac:spMk id="40" creationId="{44D85C2F-9F7A-B02F-A53D-3794B6198B6A}"/>
+          </ac:spMkLst>
+        </pc:spChg>
+        <pc:spChg chg="mod">
+          <ac:chgData name="alex seguin" userId="c47c39593cf1707d" providerId="LiveId" clId="{56C82717-B78C-4079-A034-267DC212A18F}" dt="2026-10-21T19:48:05.819" v="398" actId="1076"/>
+          <ac:spMkLst>
+            <pc:docMk/>
+            <pc:sldMk cId="0" sldId="262"/>
+            <ac:spMk id="42" creationId="{70F73380-B613-6953-61F1-F5E200D39F84}"/>
+          </ac:spMkLst>
+        </pc:spChg>
+        <pc:spChg chg="add mod">
+          <ac:chgData name="alex seguin" userId="c47c39593cf1707d" providerId="LiveId" clId="{56C82717-B78C-4079-A034-267DC212A18F}" dt="2026-10-21T19:58:18.883" v="403" actId="1076"/>
+          <ac:spMkLst>
+            <pc:docMk/>
+            <pc:sldMk cId="0" sldId="262"/>
+            <ac:spMk id="44" creationId="{DB2452FF-A6FB-7B86-8B5F-4B5A0AB3E230}"/>
+          </ac:spMkLst>
+        </pc:spChg>
+        <pc:spChg chg="add mod">
+          <ac:chgData name="alex seguin" userId="c47c39593cf1707d" providerId="LiveId" clId="{56C82717-B78C-4079-A034-267DC212A18F}" dt="2026-10-21T19:58:18.883" v="403" actId="1076"/>
+          <ac:spMkLst>
+            <pc:docMk/>
+            <pc:sldMk cId="0" sldId="262"/>
+            <ac:spMk id="46" creationId="{AA7BE2F5-4106-02CD-6595-E7D03148A825}"/>
+          </ac:spMkLst>
+        </pc:spChg>
+        <pc:spChg chg="add mod">
+          <ac:chgData name="alex seguin" userId="c47c39593cf1707d" providerId="LiveId" clId="{56C82717-B78C-4079-A034-267DC212A18F}" dt="2026-10-21T19:58:18.883" v="403" actId="1076"/>
+          <ac:spMkLst>
+            <pc:docMk/>
+            <pc:sldMk cId="0" sldId="262"/>
+            <ac:spMk id="48" creationId="{07BAD72D-34B8-CEB2-1785-0763E3CCA7E0}"/>
+          </ac:spMkLst>
+        </pc:spChg>
+        <pc:spChg chg="add mod">
+          <ac:chgData name="alex seguin" userId="c47c39593cf1707d" providerId="LiveId" clId="{56C82717-B78C-4079-A034-267DC212A18F}" dt="2026-10-21T19:58:18.883" v="403" actId="1076"/>
+          <ac:spMkLst>
+            <pc:docMk/>
+            <pc:sldMk cId="0" sldId="262"/>
+            <ac:spMk id="50" creationId="{CB51A8F4-30EE-D2AB-E647-9E3EF57FDA24}"/>
           </ac:spMkLst>
         </pc:spChg>
       </pc:sldChg>
@@ -421,6 +636,13 @@
             <ac:picMk id="31" creationId="{834FF45B-2E47-ACA2-1724-27A8CA68B566}"/>
           </ac:picMkLst>
         </pc:picChg>
+      </pc:sldChg>
+      <pc:sldChg chg="add del setBg">
+        <pc:chgData name="alex seguin" userId="c47c39593cf1707d" providerId="LiveId" clId="{56C82717-B78C-4079-A034-267DC212A18F}" dt="2026-10-21T19:57:53.893" v="400" actId="2696"/>
+        <pc:sldMkLst>
+          <pc:docMk/>
+          <pc:sldMk cId="0" sldId="265"/>
+        </pc:sldMkLst>
       </pc:sldChg>
     </pc:docChg>
   </pc:docChgLst>
@@ -3780,8 +4002,8 @@
         </p:nvSpPr>
         <p:spPr>
           <a:xfrm>
-            <a:off x="868680" y="2011680"/>
-            <a:ext cx="4800600" cy="960120"/>
+            <a:off x="1693936" y="2011680"/>
+            <a:ext cx="3150093" cy="615553"/>
           </a:xfrm>
           <a:prstGeom prst="rect">
             <a:avLst/>
@@ -3822,6 +4044,10 @@
             <a:r>
               <a:rPr dirty="0" err="1"/>
               <a:t>aérienne</a:t>
+            </a:r>
+            <a:r>
+              <a:rPr lang="en-US"/>
+              <a:t> Américaine</a:t>
             </a:r>
             <a:endParaRPr dirty="0"/>
           </a:p>
@@ -7653,23 +7879,33 @@
       </p:sp>
       <p:sp>
         <p:nvSpPr>
-          <p:cNvPr id="3" name="Rounded Rectangle 2"/>
+          <p:cNvPr id="12" name="Rounded Rectangle 2">
+            <a:extLst>
+              <a:ext uri="{FF2B5EF4-FFF2-40B4-BE49-F238E27FC236}">
+                <a16:creationId xmlns:a16="http://schemas.microsoft.com/office/drawing/2014/main" id="{780E48A7-2B7C-01EF-D5CF-F3B2A680279D}"/>
+              </a:ext>
+            </a:extLst>
+          </p:cNvPr>
           <p:cNvSpPr/>
           <p:nvPr/>
         </p:nvSpPr>
         <p:spPr>
           <a:xfrm>
-            <a:off x="914400" y="2148840"/>
-            <a:ext cx="2331720" cy="960120"/>
+            <a:off x="481906" y="3206175"/>
+            <a:ext cx="2103120" cy="1024128"/>
           </a:xfrm>
           <a:prstGeom prst="roundRect">
-            <a:avLst/>
+            <a:avLst>
+              <a:gd name="adj" fmla="val 12000"/>
+            </a:avLst>
           </a:prstGeom>
           <a:solidFill>
-            <a:srgbClr val="FFFFFF"/>
+            <a:srgbClr val="EEF5FC"/>
           </a:solidFill>
-          <a:ln>
-            <a:noFill/>
+          <a:ln w="19050">
+            <a:solidFill>
+              <a:srgbClr val="417EB9"/>
+            </a:solidFill>
           </a:ln>
         </p:spPr>
         <p:style>
@@ -7697,58 +7933,33 @@
       </p:sp>
       <p:sp>
         <p:nvSpPr>
-          <p:cNvPr id="4" name="TextBox 3"/>
-          <p:cNvSpPr txBox="1"/>
-          <p:nvPr/>
-        </p:nvSpPr>
-        <p:spPr>
-          <a:xfrm>
-            <a:off x="1005840" y="2450592"/>
-            <a:ext cx="2148840" cy="365760"/>
-          </a:xfrm>
-          <a:prstGeom prst="rect">
-            <a:avLst/>
-          </a:prstGeom>
-          <a:noFill/>
-        </p:spPr>
-        <p:txBody>
-          <a:bodyPr wrap="none">
-            <a:spAutoFit/>
-          </a:bodyPr>
-          <a:lstStyle/>
-          <a:p>
-            <a:pPr algn="ctr">
-              <a:defRPr sz="1600" b="1">
-                <a:solidFill>
-                  <a:srgbClr val="193755"/>
-                </a:solidFill>
-              </a:defRPr>
-            </a:pPr>
-            <a:r>
-              <a:t>PRÉPARATION</a:t>
-            </a:r>
-          </a:p>
-        </p:txBody>
-      </p:sp>
-      <p:sp>
-        <p:nvSpPr>
-          <p:cNvPr id="5" name="Rounded Rectangle 4"/>
+          <p:cNvPr id="14" name="Rounded Rectangle 2">
+            <a:extLst>
+              <a:ext uri="{FF2B5EF4-FFF2-40B4-BE49-F238E27FC236}">
+                <a16:creationId xmlns:a16="http://schemas.microsoft.com/office/drawing/2014/main" id="{A7B1C36E-5A28-DAF5-972B-A689366F1964}"/>
+              </a:ext>
+            </a:extLst>
+          </p:cNvPr>
           <p:cNvSpPr/>
           <p:nvPr/>
         </p:nvSpPr>
         <p:spPr>
           <a:xfrm>
-            <a:off x="3703320" y="2148840"/>
-            <a:ext cx="2331720" cy="960120"/>
+            <a:off x="2749618" y="3206175"/>
+            <a:ext cx="2103120" cy="1024128"/>
           </a:xfrm>
           <a:prstGeom prst="roundRect">
-            <a:avLst/>
+            <a:avLst>
+              <a:gd name="adj" fmla="val 12000"/>
+            </a:avLst>
           </a:prstGeom>
           <a:solidFill>
-            <a:srgbClr val="FFFFFF"/>
+            <a:srgbClr val="EEF5FC"/>
           </a:solidFill>
-          <a:ln>
-            <a:noFill/>
+          <a:ln w="19050">
+            <a:solidFill>
+              <a:srgbClr val="417EB9"/>
+            </a:solidFill>
           </a:ln>
         </p:spPr>
         <p:style>
@@ -7776,14 +7987,20 @@
       </p:sp>
       <p:sp>
         <p:nvSpPr>
-          <p:cNvPr id="6" name="TextBox 5"/>
+          <p:cNvPr id="16" name="TextBox 1">
+            <a:extLst>
+              <a:ext uri="{FF2B5EF4-FFF2-40B4-BE49-F238E27FC236}">
+                <a16:creationId xmlns:a16="http://schemas.microsoft.com/office/drawing/2014/main" id="{C9B5D37F-0762-C629-EAA8-DA5285A61CDD}"/>
+              </a:ext>
+            </a:extLst>
+          </p:cNvPr>
           <p:cNvSpPr txBox="1"/>
           <p:nvPr/>
         </p:nvSpPr>
         <p:spPr>
           <a:xfrm>
-            <a:off x="3794759" y="2450592"/>
-            <a:ext cx="2148840" cy="365760"/>
+            <a:off x="555058" y="3352479"/>
+            <a:ext cx="1956815" cy="713232"/>
           </a:xfrm>
           <a:prstGeom prst="rect">
             <a:avLst/>
@@ -7791,11 +8008,52 @@
           <a:noFill/>
         </p:spPr>
         <p:txBody>
-          <a:bodyPr wrap="none">
+          <a:bodyPr wrap="square" lIns="36576" tIns="18288" rIns="36576" bIns="18288" anchor="ctr">
             <a:spAutoFit/>
           </a:bodyPr>
           <a:lstStyle/>
           <a:p>
+            <a:pPr algn="ctr"/>
+            <a:r>
+              <a:rPr sz="1200" b="1">
+                <a:solidFill>
+                  <a:srgbClr val="14375A"/>
+                </a:solidFill>
+                <a:latin typeface="Aptos Display"/>
+              </a:rPr>
+              <a:t>CONTINUATION DE L’EXPLORATION</a:t>
+            </a:r>
+          </a:p>
+        </p:txBody>
+      </p:sp>
+      <p:sp>
+        <p:nvSpPr>
+          <p:cNvPr id="18" name="TextBox 3">
+            <a:extLst>
+              <a:ext uri="{FF2B5EF4-FFF2-40B4-BE49-F238E27FC236}">
+                <a16:creationId xmlns:a16="http://schemas.microsoft.com/office/drawing/2014/main" id="{12F302FD-FC9B-8F3F-F78D-AC2FD1ED8A4D}"/>
+              </a:ext>
+            </a:extLst>
+          </p:cNvPr>
+          <p:cNvSpPr txBox="1"/>
+          <p:nvPr/>
+        </p:nvSpPr>
+        <p:spPr>
+          <a:xfrm>
+            <a:off x="2822770" y="3352479"/>
+            <a:ext cx="1956815" cy="713232"/>
+          </a:xfrm>
+          <a:prstGeom prst="rect">
+            <a:avLst/>
+          </a:prstGeom>
+          <a:noFill/>
+        </p:spPr>
+        <p:txBody>
+          <a:bodyPr wrap="square" lIns="36576" tIns="18288" rIns="36576" bIns="18288" anchor="ctr">
+            <a:spAutoFit/>
+          </a:bodyPr>
+          <a:lstStyle/>
+          <a:p>
             <a:pPr algn="ctr">
               <a:defRPr sz="1600" b="1">
                 <a:solidFill>
@@ -7804,30 +8062,46 @@
               </a:defRPr>
             </a:pPr>
             <a:r>
-              <a:t>MODÉLISATION</a:t>
-            </a:r>
-          </a:p>
-        </p:txBody>
-      </p:sp>
-      <p:sp>
-        <p:nvSpPr>
-          <p:cNvPr id="7" name="Rounded Rectangle 6"/>
+              <a:rPr sz="1500" b="1" dirty="0">
+                <a:solidFill>
+                  <a:srgbClr val="14375A"/>
+                </a:solidFill>
+                <a:latin typeface="Aptos Display"/>
+              </a:rPr>
+              <a:t>PRÉPARATION</a:t>
+            </a:r>
+          </a:p>
+        </p:txBody>
+      </p:sp>
+      <p:sp>
+        <p:nvSpPr>
+          <p:cNvPr id="20" name="Rounded Rectangle 4">
+            <a:extLst>
+              <a:ext uri="{FF2B5EF4-FFF2-40B4-BE49-F238E27FC236}">
+                <a16:creationId xmlns:a16="http://schemas.microsoft.com/office/drawing/2014/main" id="{A4F86B7F-FFDE-9AA2-0098-3C4CBE636D97}"/>
+              </a:ext>
+            </a:extLst>
+          </p:cNvPr>
           <p:cNvSpPr/>
           <p:nvPr/>
         </p:nvSpPr>
         <p:spPr>
           <a:xfrm>
-            <a:off x="6492240" y="2148840"/>
-            <a:ext cx="2331720" cy="960120"/>
+            <a:off x="5017330" y="3206175"/>
+            <a:ext cx="2103120" cy="1024128"/>
           </a:xfrm>
           <a:prstGeom prst="roundRect">
-            <a:avLst/>
+            <a:avLst>
+              <a:gd name="adj" fmla="val 12000"/>
+            </a:avLst>
           </a:prstGeom>
           <a:solidFill>
-            <a:srgbClr val="FFFFFF"/>
+            <a:srgbClr val="EEF5FC"/>
           </a:solidFill>
-          <a:ln>
-            <a:noFill/>
+          <a:ln w="19050">
+            <a:solidFill>
+              <a:srgbClr val="417EB9"/>
+            </a:solidFill>
           </a:ln>
         </p:spPr>
         <p:style>
@@ -7855,14 +8129,20 @@
       </p:sp>
       <p:sp>
         <p:nvSpPr>
-          <p:cNvPr id="8" name="TextBox 7"/>
+          <p:cNvPr id="22" name="TextBox 5">
+            <a:extLst>
+              <a:ext uri="{FF2B5EF4-FFF2-40B4-BE49-F238E27FC236}">
+                <a16:creationId xmlns:a16="http://schemas.microsoft.com/office/drawing/2014/main" id="{F961F16A-A273-E268-AA91-A8A34CC7BD2A}"/>
+              </a:ext>
+            </a:extLst>
+          </p:cNvPr>
           <p:cNvSpPr txBox="1"/>
           <p:nvPr/>
         </p:nvSpPr>
         <p:spPr>
           <a:xfrm>
-            <a:off x="6583679" y="2450592"/>
-            <a:ext cx="2148840" cy="365760"/>
+            <a:off x="5090482" y="3352479"/>
+            <a:ext cx="1956815" cy="713232"/>
           </a:xfrm>
           <a:prstGeom prst="rect">
             <a:avLst/>
@@ -7870,7 +8150,7 @@
           <a:noFill/>
         </p:spPr>
         <p:txBody>
-          <a:bodyPr wrap="none">
+          <a:bodyPr wrap="square" lIns="36576" tIns="18288" rIns="36576" bIns="18288" anchor="ctr">
             <a:spAutoFit/>
           </a:bodyPr>
           <a:lstStyle/>
@@ -7883,30 +8163,46 @@
               </a:defRPr>
             </a:pPr>
             <a:r>
-              <a:t>OPTIMISATION</a:t>
-            </a:r>
-          </a:p>
-        </p:txBody>
-      </p:sp>
-      <p:sp>
-        <p:nvSpPr>
-          <p:cNvPr id="9" name="Rounded Rectangle 8"/>
+              <a:rPr sz="1500" b="1">
+                <a:solidFill>
+                  <a:srgbClr val="14375A"/>
+                </a:solidFill>
+                <a:latin typeface="Aptos Display"/>
+              </a:rPr>
+              <a:t>MODÉLISATION</a:t>
+            </a:r>
+          </a:p>
+        </p:txBody>
+      </p:sp>
+      <p:sp>
+        <p:nvSpPr>
+          <p:cNvPr id="24" name="Rounded Rectangle 6">
+            <a:extLst>
+              <a:ext uri="{FF2B5EF4-FFF2-40B4-BE49-F238E27FC236}">
+                <a16:creationId xmlns:a16="http://schemas.microsoft.com/office/drawing/2014/main" id="{AE2B48B7-690A-DA1A-57BF-5F33AED832DC}"/>
+              </a:ext>
+            </a:extLst>
+          </p:cNvPr>
           <p:cNvSpPr/>
           <p:nvPr/>
         </p:nvSpPr>
         <p:spPr>
           <a:xfrm>
-            <a:off x="9281159" y="2148840"/>
-            <a:ext cx="2331720" cy="960120"/>
+            <a:off x="7285042" y="3206175"/>
+            <a:ext cx="2103120" cy="1024128"/>
           </a:xfrm>
           <a:prstGeom prst="roundRect">
-            <a:avLst/>
+            <a:avLst>
+              <a:gd name="adj" fmla="val 12000"/>
+            </a:avLst>
           </a:prstGeom>
           <a:solidFill>
-            <a:srgbClr val="FFFFFF"/>
+            <a:srgbClr val="EEF5FC"/>
           </a:solidFill>
-          <a:ln>
-            <a:noFill/>
+          <a:ln w="19050">
+            <a:solidFill>
+              <a:srgbClr val="417EB9"/>
+            </a:solidFill>
           </a:ln>
         </p:spPr>
         <p:style>
@@ -7934,14 +8230,20 @@
       </p:sp>
       <p:sp>
         <p:nvSpPr>
-          <p:cNvPr id="10" name="TextBox 9"/>
+          <p:cNvPr id="26" name="TextBox 7">
+            <a:extLst>
+              <a:ext uri="{FF2B5EF4-FFF2-40B4-BE49-F238E27FC236}">
+                <a16:creationId xmlns:a16="http://schemas.microsoft.com/office/drawing/2014/main" id="{4DF3A866-B3D2-F35E-98DA-A980052C2893}"/>
+              </a:ext>
+            </a:extLst>
+          </p:cNvPr>
           <p:cNvSpPr txBox="1"/>
           <p:nvPr/>
         </p:nvSpPr>
         <p:spPr>
           <a:xfrm>
-            <a:off x="9372599" y="2450592"/>
-            <a:ext cx="2148840" cy="365760"/>
+            <a:off x="7358194" y="3352479"/>
+            <a:ext cx="1956815" cy="713232"/>
           </a:xfrm>
           <a:prstGeom prst="rect">
             <a:avLst/>
@@ -7949,7 +8251,7 @@
           <a:noFill/>
         </p:spPr>
         <p:txBody>
-          <a:bodyPr wrap="none">
+          <a:bodyPr wrap="square" lIns="36576" tIns="18288" rIns="36576" bIns="18288" anchor="ctr">
             <a:spAutoFit/>
           </a:bodyPr>
           <a:lstStyle/>
@@ -7962,21 +8264,87 @@
               </a:defRPr>
             </a:pPr>
             <a:r>
-              <a:t>ÉVALUATION</a:t>
-            </a:r>
-          </a:p>
-        </p:txBody>
-      </p:sp>
-      <p:sp>
-        <p:nvSpPr>
-          <p:cNvPr id="11" name="TextBox 10"/>
+              <a:rPr sz="1500" b="1">
+                <a:solidFill>
+                  <a:srgbClr val="14375A"/>
+                </a:solidFill>
+                <a:latin typeface="Aptos Display"/>
+              </a:rPr>
+              <a:t>OPTIMISATION</a:t>
+            </a:r>
+          </a:p>
+        </p:txBody>
+      </p:sp>
+      <p:sp>
+        <p:nvSpPr>
+          <p:cNvPr id="28" name="Rounded Rectangle 8">
+            <a:extLst>
+              <a:ext uri="{FF2B5EF4-FFF2-40B4-BE49-F238E27FC236}">
+                <a16:creationId xmlns:a16="http://schemas.microsoft.com/office/drawing/2014/main" id="{03BE9589-7592-94FC-F059-40D5495CE150}"/>
+              </a:ext>
+            </a:extLst>
+          </p:cNvPr>
+          <p:cNvSpPr/>
+          <p:nvPr/>
+        </p:nvSpPr>
+        <p:spPr>
+          <a:xfrm>
+            <a:off x="9552754" y="3206175"/>
+            <a:ext cx="2103120" cy="1024128"/>
+          </a:xfrm>
+          <a:prstGeom prst="roundRect">
+            <a:avLst>
+              <a:gd name="adj" fmla="val 12000"/>
+            </a:avLst>
+          </a:prstGeom>
+          <a:solidFill>
+            <a:srgbClr val="EEF5FC"/>
+          </a:solidFill>
+          <a:ln w="19050">
+            <a:solidFill>
+              <a:srgbClr val="417EB9"/>
+            </a:solidFill>
+          </a:ln>
+        </p:spPr>
+        <p:style>
+          <a:lnRef idx="1">
+            <a:schemeClr val="accent1"/>
+          </a:lnRef>
+          <a:fillRef idx="3">
+            <a:schemeClr val="accent1"/>
+          </a:fillRef>
+          <a:effectRef idx="2">
+            <a:schemeClr val="accent1"/>
+          </a:effectRef>
+          <a:fontRef idx="minor">
+            <a:schemeClr val="lt1"/>
+          </a:fontRef>
+        </p:style>
+        <p:txBody>
+          <a:bodyPr rtlCol="0" anchor="ctr"/>
+          <a:lstStyle/>
+          <a:p>
+            <a:pPr algn="ctr"/>
+            <a:endParaRPr/>
+          </a:p>
+        </p:txBody>
+      </p:sp>
+      <p:sp>
+        <p:nvSpPr>
+          <p:cNvPr id="30" name="TextBox 9">
+            <a:extLst>
+              <a:ext uri="{FF2B5EF4-FFF2-40B4-BE49-F238E27FC236}">
+                <a16:creationId xmlns:a16="http://schemas.microsoft.com/office/drawing/2014/main" id="{276137B4-FFB0-8540-88BA-599048AFD9F6}"/>
+              </a:ext>
+            </a:extLst>
+          </p:cNvPr>
           <p:cNvSpPr txBox="1"/>
           <p:nvPr/>
         </p:nvSpPr>
         <p:spPr>
           <a:xfrm>
-            <a:off x="2980041" y="4069080"/>
-            <a:ext cx="6201441" cy="461665"/>
+            <a:off x="9625906" y="3352479"/>
+            <a:ext cx="1956815" cy="713232"/>
           </a:xfrm>
           <a:prstGeom prst="rect">
             <a:avLst/>
@@ -7984,25 +8352,481 @@
           <a:noFill/>
         </p:spPr>
         <p:txBody>
-          <a:bodyPr wrap="none">
+          <a:bodyPr wrap="square" lIns="36576" tIns="18288" rIns="36576" bIns="18288" anchor="ctr">
             <a:spAutoFit/>
           </a:bodyPr>
           <a:lstStyle/>
           <a:p>
             <a:pPr algn="ctr">
-              <a:defRPr sz="2400" b="1">
-                <a:solidFill>
-                  <a:srgbClr val="B9DCFA"/>
+              <a:defRPr sz="1600" b="1">
+                <a:solidFill>
+                  <a:srgbClr val="193755"/>
                 </a:solidFill>
               </a:defRPr>
             </a:pPr>
             <a:r>
-              <a:rPr dirty="0" err="1"/>
-              <a:t>Nettoyer</a:t>
-            </a:r>
-            <a:r>
-              <a:rPr dirty="0"/>
-              <a:t>  •  Transformer  •  Tester  •  Comparer</a:t>
+              <a:rPr sz="1500" b="1">
+                <a:solidFill>
+                  <a:srgbClr val="14375A"/>
+                </a:solidFill>
+                <a:latin typeface="Aptos Display"/>
+              </a:rPr>
+              <a:t>ÉVALUATION</a:t>
+            </a:r>
+          </a:p>
+        </p:txBody>
+      </p:sp>
+      <p:sp>
+        <p:nvSpPr>
+          <p:cNvPr id="32" name="Oval 22">
+            <a:extLst>
+              <a:ext uri="{FF2B5EF4-FFF2-40B4-BE49-F238E27FC236}">
+                <a16:creationId xmlns:a16="http://schemas.microsoft.com/office/drawing/2014/main" id="{04C09199-4554-0BF0-EA11-CFB4A6D8EE86}"/>
+              </a:ext>
+            </a:extLst>
+          </p:cNvPr>
+          <p:cNvSpPr/>
+          <p:nvPr/>
+        </p:nvSpPr>
+        <p:spPr>
+          <a:xfrm>
+            <a:off x="2127825" y="3748799"/>
+            <a:ext cx="384048" cy="384048"/>
+          </a:xfrm>
+          <a:prstGeom prst="ellipse">
+            <a:avLst/>
+          </a:prstGeom>
+          <a:solidFill>
+            <a:srgbClr val="E0EFFA"/>
+          </a:solidFill>
+          <a:ln>
+            <a:noFill/>
+          </a:ln>
+        </p:spPr>
+        <p:style>
+          <a:lnRef idx="1">
+            <a:schemeClr val="accent1"/>
+          </a:lnRef>
+          <a:fillRef idx="3">
+            <a:schemeClr val="accent1"/>
+          </a:fillRef>
+          <a:effectRef idx="2">
+            <a:schemeClr val="accent1"/>
+          </a:effectRef>
+          <a:fontRef idx="minor">
+            <a:schemeClr val="lt1"/>
+          </a:fontRef>
+        </p:style>
+        <p:txBody>
+          <a:bodyPr rtlCol="0" anchor="ctr"/>
+          <a:lstStyle/>
+          <a:p>
+            <a:pPr algn="ctr"/>
+            <a:endParaRPr/>
+          </a:p>
+        </p:txBody>
+      </p:sp>
+      <p:sp>
+        <p:nvSpPr>
+          <p:cNvPr id="34" name="TextBox 23">
+            <a:extLst>
+              <a:ext uri="{FF2B5EF4-FFF2-40B4-BE49-F238E27FC236}">
+                <a16:creationId xmlns:a16="http://schemas.microsoft.com/office/drawing/2014/main" id="{3267D279-A24C-D93C-C241-792CC4B9ECCD}"/>
+              </a:ext>
+            </a:extLst>
+          </p:cNvPr>
+          <p:cNvSpPr txBox="1"/>
+          <p:nvPr/>
+        </p:nvSpPr>
+        <p:spPr>
+          <a:xfrm>
+            <a:off x="2127825" y="3773103"/>
+            <a:ext cx="384048" cy="347472"/>
+          </a:xfrm>
+          <a:prstGeom prst="rect">
+            <a:avLst/>
+          </a:prstGeom>
+          <a:noFill/>
+        </p:spPr>
+        <p:txBody>
+          <a:bodyPr wrap="none" lIns="0" tIns="0" rIns="0" bIns="0">
+            <a:spAutoFit/>
+          </a:bodyPr>
+          <a:lstStyle/>
+          <a:p>
+            <a:pPr algn="ctr"/>
+            <a:r>
+              <a:rPr sz="1900" b="1" dirty="0">
+                <a:solidFill>
+                  <a:srgbClr val="1C5B91"/>
+                </a:solidFill>
+                <a:latin typeface="Arial"/>
+              </a:rPr>
+              <a:t>⌕</a:t>
+            </a:r>
+          </a:p>
+        </p:txBody>
+      </p:sp>
+      <p:sp>
+        <p:nvSpPr>
+          <p:cNvPr id="36" name="Oval 24">
+            <a:extLst>
+              <a:ext uri="{FF2B5EF4-FFF2-40B4-BE49-F238E27FC236}">
+                <a16:creationId xmlns:a16="http://schemas.microsoft.com/office/drawing/2014/main" id="{334C81F5-B1F2-87BB-8857-61750FA9FC66}"/>
+              </a:ext>
+            </a:extLst>
+          </p:cNvPr>
+          <p:cNvSpPr/>
+          <p:nvPr/>
+        </p:nvSpPr>
+        <p:spPr>
+          <a:xfrm>
+            <a:off x="4404682" y="3815214"/>
+            <a:ext cx="384048" cy="384048"/>
+          </a:xfrm>
+          <a:prstGeom prst="ellipse">
+            <a:avLst/>
+          </a:prstGeom>
+          <a:solidFill>
+            <a:srgbClr val="E0EFFA"/>
+          </a:solidFill>
+          <a:ln>
+            <a:noFill/>
+          </a:ln>
+        </p:spPr>
+        <p:style>
+          <a:lnRef idx="1">
+            <a:schemeClr val="accent1"/>
+          </a:lnRef>
+          <a:fillRef idx="3">
+            <a:schemeClr val="accent1"/>
+          </a:fillRef>
+          <a:effectRef idx="2">
+            <a:schemeClr val="accent1"/>
+          </a:effectRef>
+          <a:fontRef idx="minor">
+            <a:schemeClr val="lt1"/>
+          </a:fontRef>
+        </p:style>
+        <p:txBody>
+          <a:bodyPr rtlCol="0" anchor="ctr"/>
+          <a:lstStyle/>
+          <a:p>
+            <a:pPr algn="ctr"/>
+            <a:endParaRPr/>
+          </a:p>
+        </p:txBody>
+      </p:sp>
+      <p:sp>
+        <p:nvSpPr>
+          <p:cNvPr id="38" name="TextBox 25">
+            <a:extLst>
+              <a:ext uri="{FF2B5EF4-FFF2-40B4-BE49-F238E27FC236}">
+                <a16:creationId xmlns:a16="http://schemas.microsoft.com/office/drawing/2014/main" id="{05073E37-D94D-5EDB-B98C-A51AF4E21BBE}"/>
+              </a:ext>
+            </a:extLst>
+          </p:cNvPr>
+          <p:cNvSpPr txBox="1"/>
+          <p:nvPr/>
+        </p:nvSpPr>
+        <p:spPr>
+          <a:xfrm>
+            <a:off x="4404682" y="3819786"/>
+            <a:ext cx="384048" cy="347472"/>
+          </a:xfrm>
+          <a:prstGeom prst="rect">
+            <a:avLst/>
+          </a:prstGeom>
+          <a:noFill/>
+        </p:spPr>
+        <p:txBody>
+          <a:bodyPr wrap="none" lIns="0" tIns="0" rIns="0" bIns="0">
+            <a:spAutoFit/>
+          </a:bodyPr>
+          <a:lstStyle/>
+          <a:p>
+            <a:pPr algn="ctr"/>
+            <a:r>
+              <a:rPr sz="1900" b="1">
+                <a:solidFill>
+                  <a:srgbClr val="1C5B91"/>
+                </a:solidFill>
+                <a:latin typeface="Arial"/>
+              </a:rPr>
+              <a:t>✓</a:t>
+            </a:r>
+          </a:p>
+        </p:txBody>
+      </p:sp>
+      <p:sp>
+        <p:nvSpPr>
+          <p:cNvPr id="40" name="Oval 26">
+            <a:extLst>
+              <a:ext uri="{FF2B5EF4-FFF2-40B4-BE49-F238E27FC236}">
+                <a16:creationId xmlns:a16="http://schemas.microsoft.com/office/drawing/2014/main" id="{44D85C2F-9F7A-B02F-A53D-3794B6198B6A}"/>
+              </a:ext>
+            </a:extLst>
+          </p:cNvPr>
+          <p:cNvSpPr/>
+          <p:nvPr/>
+        </p:nvSpPr>
+        <p:spPr>
+          <a:xfrm>
+            <a:off x="6699826" y="3802461"/>
+            <a:ext cx="384048" cy="384048"/>
+          </a:xfrm>
+          <a:prstGeom prst="ellipse">
+            <a:avLst/>
+          </a:prstGeom>
+          <a:solidFill>
+            <a:srgbClr val="E0EFFA"/>
+          </a:solidFill>
+          <a:ln>
+            <a:noFill/>
+          </a:ln>
+        </p:spPr>
+        <p:style>
+          <a:lnRef idx="1">
+            <a:schemeClr val="accent1"/>
+          </a:lnRef>
+          <a:fillRef idx="3">
+            <a:schemeClr val="accent1"/>
+          </a:fillRef>
+          <a:effectRef idx="2">
+            <a:schemeClr val="accent1"/>
+          </a:effectRef>
+          <a:fontRef idx="minor">
+            <a:schemeClr val="lt1"/>
+          </a:fontRef>
+        </p:style>
+        <p:txBody>
+          <a:bodyPr rtlCol="0" anchor="ctr"/>
+          <a:lstStyle/>
+          <a:p>
+            <a:pPr algn="ctr"/>
+            <a:endParaRPr/>
+          </a:p>
+        </p:txBody>
+      </p:sp>
+      <p:sp>
+        <p:nvSpPr>
+          <p:cNvPr id="42" name="TextBox 27">
+            <a:extLst>
+              <a:ext uri="{FF2B5EF4-FFF2-40B4-BE49-F238E27FC236}">
+                <a16:creationId xmlns:a16="http://schemas.microsoft.com/office/drawing/2014/main" id="{70F73380-B613-6953-61F1-F5E200D39F84}"/>
+              </a:ext>
+            </a:extLst>
+          </p:cNvPr>
+          <p:cNvSpPr txBox="1"/>
+          <p:nvPr/>
+        </p:nvSpPr>
+        <p:spPr>
+          <a:xfrm>
+            <a:off x="6699826" y="3807033"/>
+            <a:ext cx="384048" cy="347472"/>
+          </a:xfrm>
+          <a:prstGeom prst="rect">
+            <a:avLst/>
+          </a:prstGeom>
+          <a:noFill/>
+        </p:spPr>
+        <p:txBody>
+          <a:bodyPr wrap="none" lIns="0" tIns="0" rIns="0" bIns="0">
+            <a:spAutoFit/>
+          </a:bodyPr>
+          <a:lstStyle/>
+          <a:p>
+            <a:pPr algn="ctr"/>
+            <a:r>
+              <a:rPr sz="1900" b="1">
+                <a:solidFill>
+                  <a:srgbClr val="1C5B91"/>
+                </a:solidFill>
+                <a:latin typeface="Arial"/>
+              </a:rPr>
+              <a:t>✦</a:t>
+            </a:r>
+          </a:p>
+        </p:txBody>
+      </p:sp>
+      <p:sp>
+        <p:nvSpPr>
+          <p:cNvPr id="44" name="Oval 28">
+            <a:extLst>
+              <a:ext uri="{FF2B5EF4-FFF2-40B4-BE49-F238E27FC236}">
+                <a16:creationId xmlns:a16="http://schemas.microsoft.com/office/drawing/2014/main" id="{DB2452FF-A6FB-7B86-8B5F-4B5A0AB3E230}"/>
+              </a:ext>
+            </a:extLst>
+          </p:cNvPr>
+          <p:cNvSpPr/>
+          <p:nvPr/>
+        </p:nvSpPr>
+        <p:spPr>
+          <a:xfrm>
+            <a:off x="8967538" y="3829411"/>
+            <a:ext cx="384048" cy="384048"/>
+          </a:xfrm>
+          <a:prstGeom prst="ellipse">
+            <a:avLst/>
+          </a:prstGeom>
+          <a:solidFill>
+            <a:srgbClr val="E0EFFA"/>
+          </a:solidFill>
+          <a:ln>
+            <a:noFill/>
+          </a:ln>
+        </p:spPr>
+        <p:style>
+          <a:lnRef idx="1">
+            <a:schemeClr val="accent1"/>
+          </a:lnRef>
+          <a:fillRef idx="3">
+            <a:schemeClr val="accent1"/>
+          </a:fillRef>
+          <a:effectRef idx="2">
+            <a:schemeClr val="accent1"/>
+          </a:effectRef>
+          <a:fontRef idx="minor">
+            <a:schemeClr val="lt1"/>
+          </a:fontRef>
+        </p:style>
+        <p:txBody>
+          <a:bodyPr rtlCol="0" anchor="ctr"/>
+          <a:lstStyle/>
+          <a:p>
+            <a:pPr algn="ctr"/>
+            <a:endParaRPr/>
+          </a:p>
+        </p:txBody>
+      </p:sp>
+      <p:sp>
+        <p:nvSpPr>
+          <p:cNvPr id="46" name="TextBox 29">
+            <a:extLst>
+              <a:ext uri="{FF2B5EF4-FFF2-40B4-BE49-F238E27FC236}">
+                <a16:creationId xmlns:a16="http://schemas.microsoft.com/office/drawing/2014/main" id="{AA7BE2F5-4106-02CD-6595-E7D03148A825}"/>
+              </a:ext>
+            </a:extLst>
+          </p:cNvPr>
+          <p:cNvSpPr txBox="1"/>
+          <p:nvPr/>
+        </p:nvSpPr>
+        <p:spPr>
+          <a:xfrm>
+            <a:off x="8967538" y="3833983"/>
+            <a:ext cx="384048" cy="347472"/>
+          </a:xfrm>
+          <a:prstGeom prst="rect">
+            <a:avLst/>
+          </a:prstGeom>
+          <a:noFill/>
+        </p:spPr>
+        <p:txBody>
+          <a:bodyPr wrap="none" lIns="0" tIns="0" rIns="0" bIns="0">
+            <a:spAutoFit/>
+          </a:bodyPr>
+          <a:lstStyle/>
+          <a:p>
+            <a:pPr algn="ctr"/>
+            <a:r>
+              <a:rPr sz="1900" b="1">
+                <a:solidFill>
+                  <a:srgbClr val="1C5B91"/>
+                </a:solidFill>
+                <a:latin typeface="Arial"/>
+              </a:rPr>
+              <a:t>⚙</a:t>
+            </a:r>
+          </a:p>
+        </p:txBody>
+      </p:sp>
+      <p:sp>
+        <p:nvSpPr>
+          <p:cNvPr id="48" name="Oval 30">
+            <a:extLst>
+              <a:ext uri="{FF2B5EF4-FFF2-40B4-BE49-F238E27FC236}">
+                <a16:creationId xmlns:a16="http://schemas.microsoft.com/office/drawing/2014/main" id="{07BAD72D-34B8-CEB2-1785-0763E3CCA7E0}"/>
+              </a:ext>
+            </a:extLst>
+          </p:cNvPr>
+          <p:cNvSpPr/>
+          <p:nvPr/>
+        </p:nvSpPr>
+        <p:spPr>
+          <a:xfrm>
+            <a:off x="11246799" y="3810642"/>
+            <a:ext cx="384048" cy="384048"/>
+          </a:xfrm>
+          <a:prstGeom prst="ellipse">
+            <a:avLst/>
+          </a:prstGeom>
+          <a:solidFill>
+            <a:srgbClr val="E0EFFA"/>
+          </a:solidFill>
+          <a:ln>
+            <a:noFill/>
+          </a:ln>
+        </p:spPr>
+        <p:style>
+          <a:lnRef idx="1">
+            <a:schemeClr val="accent1"/>
+          </a:lnRef>
+          <a:fillRef idx="3">
+            <a:schemeClr val="accent1"/>
+          </a:fillRef>
+          <a:effectRef idx="2">
+            <a:schemeClr val="accent1"/>
+          </a:effectRef>
+          <a:fontRef idx="minor">
+            <a:schemeClr val="lt1"/>
+          </a:fontRef>
+        </p:style>
+        <p:txBody>
+          <a:bodyPr rtlCol="0" anchor="ctr"/>
+          <a:lstStyle/>
+          <a:p>
+            <a:pPr algn="ctr"/>
+            <a:endParaRPr/>
+          </a:p>
+        </p:txBody>
+      </p:sp>
+      <p:sp>
+        <p:nvSpPr>
+          <p:cNvPr id="50" name="TextBox 31">
+            <a:extLst>
+              <a:ext uri="{FF2B5EF4-FFF2-40B4-BE49-F238E27FC236}">
+                <a16:creationId xmlns:a16="http://schemas.microsoft.com/office/drawing/2014/main" id="{CB51A8F4-30EE-D2AB-E647-9E3EF57FDA24}"/>
+              </a:ext>
+            </a:extLst>
+          </p:cNvPr>
+          <p:cNvSpPr txBox="1"/>
+          <p:nvPr/>
+        </p:nvSpPr>
+        <p:spPr>
+          <a:xfrm>
+            <a:off x="11246799" y="3815214"/>
+            <a:ext cx="384048" cy="347472"/>
+          </a:xfrm>
+          <a:prstGeom prst="rect">
+            <a:avLst/>
+          </a:prstGeom>
+          <a:noFill/>
+        </p:spPr>
+        <p:txBody>
+          <a:bodyPr wrap="none" lIns="0" tIns="0" rIns="0" bIns="0">
+            <a:spAutoFit/>
+          </a:bodyPr>
+          <a:lstStyle/>
+          <a:p>
+            <a:pPr algn="ctr"/>
+            <a:r>
+              <a:rPr sz="1900" b="1" dirty="0">
+                <a:solidFill>
+                  <a:srgbClr val="1C5B91"/>
+                </a:solidFill>
+                <a:latin typeface="Arial"/>
+              </a:rPr>
+              <a:t>↗</a:t>
             </a:r>
           </a:p>
         </p:txBody>
